--- a/presentaties/export/260921_alignment_npuls_pijlers/260921_alignment_npuls_pijlers.pptx
+++ b/presentaties/export/260921_alignment_npuls_pijlers/260921_alignment_npuls_pijlers.pptx
@@ -2698,7 +2698,7 @@
       </p:grpSpPr>
       <p:sp>
         <p:nvSpPr>
-          <p:cNvPr id="429" name=""/>
+          <p:cNvPr id="427" name=""/>
           <p:cNvSpPr/>
           <p:nvPr/>
         </p:nvSpPr>
@@ -2756,7 +2756,7 @@
       </p:sp>
       <p:sp>
         <p:nvSpPr>
-          <p:cNvPr id="430" name=""/>
+          <p:cNvPr id="428" name=""/>
           <p:cNvSpPr/>
           <p:nvPr/>
         </p:nvSpPr>
@@ -2814,7 +2814,7 @@
       </p:sp>
       <p:sp>
         <p:nvSpPr>
-          <p:cNvPr id="431" name=""/>
+          <p:cNvPr id="429" name=""/>
           <p:cNvSpPr/>
           <p:nvPr/>
         </p:nvSpPr>
@@ -2872,7 +2872,7 @@
       </p:sp>
       <p:sp>
         <p:nvSpPr>
-          <p:cNvPr id="432" name=""/>
+          <p:cNvPr id="430" name=""/>
           <p:cNvSpPr/>
           <p:nvPr/>
         </p:nvSpPr>
@@ -2930,7 +2930,7 @@
       </p:sp>
       <p:sp>
         <p:nvSpPr>
-          <p:cNvPr id="433" name=""/>
+          <p:cNvPr id="431" name=""/>
           <p:cNvSpPr/>
           <p:nvPr/>
         </p:nvSpPr>
@@ -2988,7 +2988,7 @@
       </p:sp>
       <p:sp>
         <p:nvSpPr>
-          <p:cNvPr id="434" name=""/>
+          <p:cNvPr id="432" name=""/>
           <p:cNvSpPr/>
           <p:nvPr/>
         </p:nvSpPr>
@@ -3046,7 +3046,7 @@
       </p:sp>
       <p:pic>
         <p:nvPicPr>
-          <p:cNvPr id="435" name="" descr=""/>
+          <p:cNvPr id="433" name="" descr=""/>
           <p:cNvPicPr/>
           <p:nvPr/>
         </p:nvPicPr>
@@ -3069,7 +3069,7 @@
       </p:pic>
       <p:sp>
         <p:nvSpPr>
-          <p:cNvPr id="436" name=""/>
+          <p:cNvPr id="434" name=""/>
           <p:cNvSpPr/>
           <p:nvPr/>
         </p:nvSpPr>
@@ -3127,7 +3127,7 @@
       </p:sp>
       <p:sp>
         <p:nvSpPr>
-          <p:cNvPr id="437" name=""/>
+          <p:cNvPr id="435" name=""/>
           <p:cNvSpPr/>
           <p:nvPr/>
         </p:nvSpPr>
@@ -3185,7 +3185,7 @@
       </p:sp>
       <p:sp>
         <p:nvSpPr>
-          <p:cNvPr id="438" name=""/>
+          <p:cNvPr id="436" name=""/>
           <p:cNvSpPr/>
           <p:nvPr/>
         </p:nvSpPr>
@@ -3243,7 +3243,7 @@
       </p:sp>
       <p:sp>
         <p:nvSpPr>
-          <p:cNvPr id="439" name=""/>
+          <p:cNvPr id="437" name=""/>
           <p:cNvSpPr/>
           <p:nvPr/>
         </p:nvSpPr>
@@ -3301,7 +3301,7 @@
       </p:sp>
       <p:sp>
         <p:nvSpPr>
-          <p:cNvPr id="440" name=""/>
+          <p:cNvPr id="438" name=""/>
           <p:cNvSpPr/>
           <p:nvPr/>
         </p:nvSpPr>
@@ -3359,7 +3359,7 @@
       </p:sp>
       <p:sp>
         <p:nvSpPr>
-          <p:cNvPr id="441" name=""/>
+          <p:cNvPr id="439" name=""/>
           <p:cNvSpPr txBox="1"/>
           <p:nvPr/>
         </p:nvSpPr>
@@ -3402,7 +3402,7 @@
       </p:sp>
       <p:sp>
         <p:nvSpPr>
-          <p:cNvPr id="442" name=""/>
+          <p:cNvPr id="440" name=""/>
           <p:cNvSpPr/>
           <p:nvPr/>
         </p:nvSpPr>
@@ -3460,7 +3460,7 @@
       </p:sp>
       <p:sp>
         <p:nvSpPr>
-          <p:cNvPr id="443" name=""/>
+          <p:cNvPr id="441" name=""/>
           <p:cNvSpPr txBox="1"/>
           <p:nvPr/>
         </p:nvSpPr>
@@ -3503,7 +3503,7 @@
       </p:sp>
       <p:sp>
         <p:nvSpPr>
-          <p:cNvPr id="444" name=""/>
+          <p:cNvPr id="442" name=""/>
           <p:cNvSpPr txBox="1"/>
           <p:nvPr/>
         </p:nvSpPr>
@@ -3556,7 +3556,7 @@
       </p:sp>
       <p:sp>
         <p:nvSpPr>
-          <p:cNvPr id="445" name=""/>
+          <p:cNvPr id="443" name=""/>
           <p:cNvSpPr txBox="1"/>
           <p:nvPr/>
         </p:nvSpPr>
@@ -3599,7 +3599,7 @@
       </p:sp>
       <p:sp>
         <p:nvSpPr>
-          <p:cNvPr id="446" name=""/>
+          <p:cNvPr id="444" name=""/>
           <p:cNvSpPr/>
           <p:nvPr/>
         </p:nvSpPr>
@@ -3657,7 +3657,7 @@
       </p:sp>
       <p:sp>
         <p:nvSpPr>
-          <p:cNvPr id="447" name=""/>
+          <p:cNvPr id="445" name=""/>
           <p:cNvSpPr txBox="1"/>
           <p:nvPr/>
         </p:nvSpPr>
@@ -3700,7 +3700,7 @@
       </p:sp>
       <p:sp>
         <p:nvSpPr>
-          <p:cNvPr id="448" name=""/>
+          <p:cNvPr id="446" name=""/>
           <p:cNvSpPr txBox="1"/>
           <p:nvPr/>
         </p:nvSpPr>
@@ -3753,7 +3753,7 @@
       </p:sp>
       <p:sp>
         <p:nvSpPr>
-          <p:cNvPr id="449" name=""/>
+          <p:cNvPr id="447" name=""/>
           <p:cNvSpPr/>
           <p:nvPr/>
         </p:nvSpPr>
@@ -3811,7 +3811,7 @@
       </p:sp>
       <p:sp>
         <p:nvSpPr>
-          <p:cNvPr id="450" name=""/>
+          <p:cNvPr id="448" name=""/>
           <p:cNvSpPr txBox="1"/>
           <p:nvPr/>
         </p:nvSpPr>
@@ -3854,7 +3854,7 @@
       </p:sp>
       <p:sp>
         <p:nvSpPr>
-          <p:cNvPr id="451" name=""/>
+          <p:cNvPr id="449" name=""/>
           <p:cNvSpPr txBox="1"/>
           <p:nvPr/>
         </p:nvSpPr>
@@ -3907,7 +3907,7 @@
       </p:sp>
       <p:sp>
         <p:nvSpPr>
-          <p:cNvPr id="452" name=""/>
+          <p:cNvPr id="450" name=""/>
           <p:cNvSpPr/>
           <p:nvPr/>
         </p:nvSpPr>
@@ -3965,7 +3965,7 @@
       </p:sp>
       <p:sp>
         <p:nvSpPr>
-          <p:cNvPr id="453" name=""/>
+          <p:cNvPr id="451" name=""/>
           <p:cNvSpPr/>
           <p:nvPr/>
         </p:nvSpPr>
@@ -4023,7 +4023,7 @@
       </p:sp>
       <p:sp>
         <p:nvSpPr>
-          <p:cNvPr id="454" name=""/>
+          <p:cNvPr id="452" name=""/>
           <p:cNvSpPr/>
           <p:nvPr/>
         </p:nvSpPr>
@@ -4081,7 +4081,7 @@
       </p:sp>
       <p:sp>
         <p:nvSpPr>
-          <p:cNvPr id="455" name=""/>
+          <p:cNvPr id="453" name=""/>
           <p:cNvSpPr/>
           <p:nvPr/>
         </p:nvSpPr>
@@ -4139,7 +4139,7 @@
       </p:sp>
       <p:sp>
         <p:nvSpPr>
-          <p:cNvPr id="456" name=""/>
+          <p:cNvPr id="454" name=""/>
           <p:cNvSpPr/>
           <p:nvPr/>
         </p:nvSpPr>
@@ -4197,7 +4197,7 @@
       </p:sp>
       <p:sp>
         <p:nvSpPr>
-          <p:cNvPr id="457" name=""/>
+          <p:cNvPr id="455" name=""/>
           <p:cNvSpPr txBox="1"/>
           <p:nvPr/>
         </p:nvSpPr>
@@ -4240,7 +4240,7 @@
       </p:sp>
       <p:sp>
         <p:nvSpPr>
-          <p:cNvPr id="458" name=""/>
+          <p:cNvPr id="456" name=""/>
           <p:cNvSpPr/>
           <p:nvPr/>
         </p:nvSpPr>
@@ -4298,7 +4298,7 @@
       </p:sp>
       <p:sp>
         <p:nvSpPr>
-          <p:cNvPr id="459" name=""/>
+          <p:cNvPr id="457" name=""/>
           <p:cNvSpPr txBox="1"/>
           <p:nvPr/>
         </p:nvSpPr>
@@ -4341,7 +4341,7 @@
       </p:sp>
       <p:sp>
         <p:nvSpPr>
-          <p:cNvPr id="460" name=""/>
+          <p:cNvPr id="458" name=""/>
           <p:cNvSpPr txBox="1"/>
           <p:nvPr/>
         </p:nvSpPr>
@@ -4394,7 +4394,7 @@
       </p:sp>
       <p:sp>
         <p:nvSpPr>
-          <p:cNvPr id="461" name=""/>
+          <p:cNvPr id="459" name=""/>
           <p:cNvSpPr/>
           <p:nvPr/>
         </p:nvSpPr>
@@ -4452,7 +4452,7 @@
       </p:sp>
       <p:sp>
         <p:nvSpPr>
-          <p:cNvPr id="462" name=""/>
+          <p:cNvPr id="460" name=""/>
           <p:cNvSpPr txBox="1"/>
           <p:nvPr/>
         </p:nvSpPr>
@@ -4495,7 +4495,7 @@
       </p:sp>
       <p:sp>
         <p:nvSpPr>
-          <p:cNvPr id="463" name=""/>
+          <p:cNvPr id="461" name=""/>
           <p:cNvSpPr txBox="1"/>
           <p:nvPr/>
         </p:nvSpPr>
@@ -4548,7 +4548,7 @@
       </p:sp>
       <p:sp>
         <p:nvSpPr>
-          <p:cNvPr id="464" name=""/>
+          <p:cNvPr id="462" name=""/>
           <p:cNvSpPr/>
           <p:nvPr/>
         </p:nvSpPr>
@@ -4606,7 +4606,7 @@
       </p:sp>
       <p:sp>
         <p:nvSpPr>
-          <p:cNvPr id="465" name=""/>
+          <p:cNvPr id="463" name=""/>
           <p:cNvSpPr txBox="1"/>
           <p:nvPr/>
         </p:nvSpPr>
@@ -4649,7 +4649,7 @@
       </p:sp>
       <p:sp>
         <p:nvSpPr>
-          <p:cNvPr id="466" name=""/>
+          <p:cNvPr id="464" name=""/>
           <p:cNvSpPr txBox="1"/>
           <p:nvPr/>
         </p:nvSpPr>
@@ -4702,7 +4702,7 @@
       </p:sp>
       <p:sp>
         <p:nvSpPr>
-          <p:cNvPr id="467" name=""/>
+          <p:cNvPr id="465" name=""/>
           <p:cNvSpPr/>
           <p:nvPr/>
         </p:nvSpPr>
@@ -4760,7 +4760,7 @@
       </p:sp>
       <p:sp>
         <p:nvSpPr>
-          <p:cNvPr id="468" name=""/>
+          <p:cNvPr id="466" name=""/>
           <p:cNvSpPr txBox="1"/>
           <p:nvPr/>
         </p:nvSpPr>
@@ -4803,7 +4803,7 @@
       </p:sp>
       <p:sp>
         <p:nvSpPr>
-          <p:cNvPr id="469" name=""/>
+          <p:cNvPr id="467" name=""/>
           <p:cNvSpPr txBox="1"/>
           <p:nvPr/>
         </p:nvSpPr>
@@ -4856,7 +4856,7 @@
       </p:sp>
       <p:sp>
         <p:nvSpPr>
-          <p:cNvPr id="470" name=""/>
+          <p:cNvPr id="468" name=""/>
           <p:cNvSpPr/>
           <p:nvPr/>
         </p:nvSpPr>
@@ -4914,7 +4914,7 @@
       </p:sp>
       <p:sp>
         <p:nvSpPr>
-          <p:cNvPr id="471" name=""/>
+          <p:cNvPr id="469" name=""/>
           <p:cNvSpPr txBox="1"/>
           <p:nvPr/>
         </p:nvSpPr>
@@ -4957,7 +4957,7 @@
       </p:sp>
       <p:sp>
         <p:nvSpPr>
-          <p:cNvPr id="472" name=""/>
+          <p:cNvPr id="470" name=""/>
           <p:cNvSpPr txBox="1"/>
           <p:nvPr/>
         </p:nvSpPr>
@@ -5010,7 +5010,7 @@
       </p:sp>
       <p:sp>
         <p:nvSpPr>
-          <p:cNvPr id="473" name=""/>
+          <p:cNvPr id="471" name=""/>
           <p:cNvSpPr/>
           <p:nvPr/>
         </p:nvSpPr>
@@ -5068,7 +5068,7 @@
       </p:sp>
       <p:sp>
         <p:nvSpPr>
-          <p:cNvPr id="474" name=""/>
+          <p:cNvPr id="472" name=""/>
           <p:cNvSpPr/>
           <p:nvPr/>
         </p:nvSpPr>
@@ -5126,7 +5126,7 @@
       </p:sp>
       <p:sp>
         <p:nvSpPr>
-          <p:cNvPr id="475" name=""/>
+          <p:cNvPr id="473" name=""/>
           <p:cNvSpPr/>
           <p:nvPr/>
         </p:nvSpPr>
@@ -5184,7 +5184,7 @@
       </p:sp>
       <p:sp>
         <p:nvSpPr>
-          <p:cNvPr id="476" name=""/>
+          <p:cNvPr id="474" name=""/>
           <p:cNvSpPr/>
           <p:nvPr/>
         </p:nvSpPr>
@@ -5242,7 +5242,7 @@
       </p:sp>
       <p:sp>
         <p:nvSpPr>
-          <p:cNvPr id="477" name=""/>
+          <p:cNvPr id="475" name=""/>
           <p:cNvSpPr/>
           <p:nvPr/>
         </p:nvSpPr>
@@ -5300,7 +5300,7 @@
       </p:sp>
       <p:sp>
         <p:nvSpPr>
-          <p:cNvPr id="478" name=""/>
+          <p:cNvPr id="476" name=""/>
           <p:cNvSpPr txBox="1"/>
           <p:nvPr/>
         </p:nvSpPr>
@@ -5343,7 +5343,7 @@
       </p:sp>
       <p:sp>
         <p:nvSpPr>
-          <p:cNvPr id="479" name=""/>
+          <p:cNvPr id="477" name=""/>
           <p:cNvSpPr txBox="1"/>
           <p:nvPr/>
         </p:nvSpPr>
@@ -5396,7 +5396,7 @@
       </p:sp>
       <p:sp>
         <p:nvSpPr>
-          <p:cNvPr id="480" name=""/>
+          <p:cNvPr id="478" name=""/>
           <p:cNvSpPr txBox="1"/>
           <p:nvPr/>
         </p:nvSpPr>
@@ -7458,7 +7458,7 @@
         <p:spPr>
           <a:xfrm>
             <a:off x="4140000" y="4566240"/>
-            <a:ext cx="3349080" cy="151200"/>
+            <a:ext cx="1446840" cy="151200"/>
           </a:xfrm>
           <a:prstGeom prst="rect">
             <a:avLst/>
@@ -7481,7 +7481,7 @@
                 <a:latin typeface="Arial"/>
                 <a:ea typeface="Arial"/>
               </a:rPr>
-              <a:t>afspraken van maken. Niet alles vandaag oplossen.</a:t>
+              <a:t>afspraken van maken.</a:t>
             </a:r>
             <a:endParaRPr b="0" lang="en-US" sz="1020" spc="-1" strike="noStrike">
               <a:solidFill>
@@ -9011,7 +9011,7 @@
         <p:spPr>
           <a:xfrm>
             <a:off x="6402240" y="3984840"/>
-            <a:ext cx="2455920" cy="163440"/>
+            <a:ext cx="2268360" cy="163440"/>
           </a:xfrm>
           <a:prstGeom prst="rect">
             <a:avLst/>
@@ -9044,7 +9044,7 @@
                 <a:latin typeface="Arial"/>
                 <a:ea typeface="Arial"/>
               </a:rPr>
-              <a:t> (AII, eduXchange,</a:t>
+              <a:t> werken andere</a:t>
             </a:r>
             <a:endParaRPr b="0" lang="en-US" sz="1110" spc="-1" strike="noStrike">
               <a:solidFill>
@@ -9064,7 +9064,7 @@
         <p:spPr>
           <a:xfrm>
             <a:off x="6402240" y="4241880"/>
-            <a:ext cx="2737800" cy="163440"/>
+            <a:ext cx="2842920" cy="163440"/>
           </a:xfrm>
           <a:prstGeom prst="rect">
             <a:avLst/>
@@ -9087,7 +9087,7 @@
                 <a:latin typeface="Arial"/>
                 <a:ea typeface="Arial"/>
               </a:rPr>
-              <a:t>EduID, RIO) hebben wij te weinig beeld</a:t>
+              <a:t>ontwikkelingen: AII, eduXchange, EduID,</a:t>
             </a:r>
             <a:endParaRPr b="0" lang="en-US" sz="1110" spc="-1" strike="noStrike">
               <a:solidFill>
@@ -9107,7 +9107,7 @@
         <p:spPr>
           <a:xfrm>
             <a:off x="6402240" y="4489560"/>
-            <a:ext cx="2593080" cy="163440"/>
+            <a:ext cx="249120" cy="163440"/>
           </a:xfrm>
           <a:prstGeom prst="rect">
             <a:avLst/>
@@ -9130,7 +9130,7 @@
                 <a:latin typeface="Arial"/>
                 <a:ea typeface="Arial"/>
               </a:rPr>
-              <a:t>van wat andere ontwikkelingen doen</a:t>
+              <a:t>RIO</a:t>
             </a:r>
             <a:endParaRPr b="0" lang="en-US" sz="1110" spc="-1" strike="noStrike">
               <a:solidFill>
@@ -10728,7 +10728,7 @@
         <p:spPr>
           <a:xfrm>
             <a:off x="6262920" y="4125600"/>
-            <a:ext cx="2426760" cy="142200"/>
+            <a:ext cx="2158560" cy="142200"/>
           </a:xfrm>
           <a:prstGeom prst="rect">
             <a:avLst/>
@@ -10751,7 +10751,7 @@
                 <a:latin typeface="Arial"/>
                 <a:ea typeface="Arial"/>
               </a:rPr>
-              <a:t>OKx speciﬁceert het koppelvlak, niet de</a:t>
+              <a:t>OKx speciﬁceert het koppelvlak; de</a:t>
             </a:r>
             <a:endParaRPr b="0" lang="en-US" sz="960" spc="-1" strike="noStrike">
               <a:solidFill>
@@ -10829,7 +10829,7 @@
         <p:spPr>
           <a:xfrm>
             <a:off x="6262920" y="4296960"/>
-            <a:ext cx="633240" cy="142200"/>
+            <a:ext cx="1942200" cy="142200"/>
           </a:xfrm>
           <a:prstGeom prst="rect">
             <a:avLst/>
@@ -10852,7 +10852,7 @@
                 <a:latin typeface="Arial"/>
                 <a:ea typeface="Arial"/>
               </a:rPr>
-              <a:t>applicatie.</a:t>
+              <a:t>applicatie is van de leverancier.</a:t>
             </a:r>
             <a:endParaRPr b="0" lang="en-US" sz="960" spc="-1" strike="noStrike">
               <a:solidFill>
@@ -11272,8 +11272,8 @@
         </p:nvSpPr>
         <p:spPr>
           <a:xfrm>
-            <a:off x="456840" y="1285560"/>
-            <a:ext cx="4115160" cy="2562840"/>
+            <a:off x="456840" y="1409400"/>
+            <a:ext cx="4115160" cy="2315160"/>
           </a:xfrm>
           <a:custGeom>
             <a:avLst/>
@@ -11281,7 +11281,7 @@
             <a:ahLst/>
             <a:rect l="0" t="0" r="r" b="b"/>
             <a:pathLst>
-              <a:path w="11431" h="7119">
+              <a:path w="11431" h="6431">
                 <a:moveTo>
                   <a:pt x="0" y="0"/>
                 </a:moveTo>
@@ -11289,10 +11289,10 @@
                   <a:pt x="11431" y="0"/>
                 </a:lnTo>
                 <a:lnTo>
-                  <a:pt x="11431" y="7119"/>
-                </a:lnTo>
-                <a:lnTo>
-                  <a:pt x="0" y="7119"/>
+                  <a:pt x="11431" y="6431"/>
+                </a:lnTo>
+                <a:lnTo>
+                  <a:pt x="0" y="6431"/>
                 </a:lnTo>
                 <a:lnTo>
                   <a:pt x="0" y="0"/>
@@ -11330,7 +11330,7 @@
         </p:nvSpPr>
         <p:spPr>
           <a:xfrm>
-            <a:off x="456840" y="1285560"/>
+            <a:off x="456840" y="1409400"/>
             <a:ext cx="4115160" cy="38520"/>
           </a:xfrm>
           <a:custGeom>
@@ -11388,7 +11388,7 @@
         </p:nvSpPr>
         <p:spPr>
           <a:xfrm>
-            <a:off x="456840" y="3838320"/>
+            <a:off x="456840" y="3714480"/>
             <a:ext cx="4115160" cy="10080"/>
           </a:xfrm>
           <a:custGeom>
@@ -11446,8 +11446,8 @@
         </p:nvSpPr>
         <p:spPr>
           <a:xfrm>
-            <a:off x="4562280" y="1285560"/>
-            <a:ext cx="9720" cy="2562840"/>
+            <a:off x="4562280" y="1409400"/>
+            <a:ext cx="9720" cy="2315160"/>
           </a:xfrm>
           <a:custGeom>
             <a:avLst/>
@@ -11455,15 +11455,15 @@
             <a:ahLst/>
             <a:rect l="0" t="0" r="r" b="b"/>
             <a:pathLst>
-              <a:path w="27" h="7119">
+              <a:path w="27" h="6431">
                 <a:moveTo>
                   <a:pt x="0" y="106"/>
                 </a:moveTo>
                 <a:lnTo>
-                  <a:pt x="0" y="7119"/>
-                </a:lnTo>
-                <a:lnTo>
-                  <a:pt x="27" y="7119"/>
+                  <a:pt x="0" y="6431"/>
+                </a:lnTo>
+                <a:lnTo>
+                  <a:pt x="27" y="6431"/>
                 </a:lnTo>
                 <a:lnTo>
                   <a:pt x="27" y="0"/>
@@ -11504,8 +11504,8 @@
         </p:nvSpPr>
         <p:spPr>
           <a:xfrm>
-            <a:off x="456840" y="1285560"/>
-            <a:ext cx="10080" cy="2562840"/>
+            <a:off x="456840" y="1409400"/>
+            <a:ext cx="10080" cy="2315160"/>
           </a:xfrm>
           <a:custGeom>
             <a:avLst/>
@@ -11513,15 +11513,15 @@
             <a:ahLst/>
             <a:rect l="0" t="0" r="r" b="b"/>
             <a:pathLst>
-              <a:path w="28" h="7119">
+              <a:path w="28" h="6431">
                 <a:moveTo>
                   <a:pt x="0" y="0"/>
                 </a:moveTo>
                 <a:lnTo>
-                  <a:pt x="0" y="7119"/>
-                </a:lnTo>
-                <a:lnTo>
-                  <a:pt x="28" y="7119"/>
+                  <a:pt x="0" y="6431"/>
+                </a:lnTo>
+                <a:lnTo>
+                  <a:pt x="28" y="6431"/>
                 </a:lnTo>
                 <a:lnTo>
                   <a:pt x="28" y="106"/>
@@ -11562,7 +11562,7 @@
         </p:nvSpPr>
         <p:spPr>
           <a:xfrm>
-            <a:off x="439920" y="653400"/>
+            <a:off x="439920" y="786600"/>
             <a:ext cx="9394560" cy="399600"/>
           </a:xfrm>
           <a:prstGeom prst="rect">
@@ -11605,8 +11605,8 @@
         </p:nvSpPr>
         <p:spPr>
           <a:xfrm>
-            <a:off x="619200" y="1496880"/>
-            <a:ext cx="3754440" cy="178920"/>
+            <a:off x="619200" y="1620720"/>
+            <a:ext cx="4499640" cy="178920"/>
           </a:xfrm>
           <a:prstGeom prst="rect">
             <a:avLst/>
@@ -11629,7 +11629,7 @@
                 <a:latin typeface="Arial"/>
                 <a:ea typeface="Arial"/>
               </a:rPr>
-              <a:t>1. Kiezen door lerenden: niet dieper dan de</a:t>
+              <a:t>1. Kiezen door lerenden: tot en met de leeractiviteit</a:t>
             </a:r>
             <a:endParaRPr b="0" lang="en-US" sz="1200" spc="-1" strike="noStrike">
               <a:solidFill>
@@ -11648,50 +11648,7 @@
         </p:nvSpPr>
         <p:spPr>
           <a:xfrm>
-            <a:off x="619200" y="1744560"/>
-            <a:ext cx="1104120" cy="178920"/>
-          </a:xfrm>
-          <a:prstGeom prst="rect">
-            <a:avLst/>
-          </a:prstGeom>
-          <a:noFill/>
-          <a:ln w="0">
-            <a:noFill/>
-          </a:ln>
-        </p:spPr>
-        <p:txBody>
-          <a:bodyPr lIns="0" rIns="0" tIns="0" bIns="0" anchor="t">
-            <a:noAutofit/>
-          </a:bodyPr>
-          <a:p>
-            <a:r>
-              <a:rPr b="1" lang="en-US" sz="1200" spc="-1" strike="noStrike">
-                <a:solidFill>
-                  <a:srgbClr val="3d68ec"/>
-                </a:solidFill>
-                <a:latin typeface="Arial"/>
-                <a:ea typeface="Arial"/>
-              </a:rPr>
-              <a:t>leeractiviteit</a:t>
-            </a:r>
-            <a:endParaRPr b="0" lang="en-US" sz="1200" spc="-1" strike="noStrike">
-              <a:solidFill>
-                <a:srgbClr val="000000"/>
-              </a:solidFill>
-              <a:latin typeface="DejaVu Serif"/>
-            </a:endParaRPr>
-          </a:p>
-        </p:txBody>
-      </p:sp>
-      <p:sp>
-        <p:nvSpPr>
-          <p:cNvPr id="163" name=""/>
-          <p:cNvSpPr txBox="1"/>
-          <p:nvPr/>
-        </p:nvSpPr>
-        <p:spPr>
-          <a:xfrm>
-            <a:off x="619200" y="2050200"/>
+            <a:off x="619200" y="1916640"/>
             <a:ext cx="4214520" cy="153000"/>
           </a:xfrm>
           <a:prstGeom prst="rect">
@@ -11728,13 +11685,13 @@
       </p:sp>
       <p:sp>
         <p:nvSpPr>
-          <p:cNvPr id="164" name=""/>
+          <p:cNvPr id="163" name=""/>
           <p:cNvSpPr/>
           <p:nvPr/>
         </p:nvSpPr>
         <p:spPr>
           <a:xfrm>
-            <a:off x="618840" y="2495520"/>
+            <a:off x="618840" y="2371680"/>
             <a:ext cx="209880" cy="209880"/>
           </a:xfrm>
           <a:custGeom>
@@ -11745,11 +11702,11 @@
             <a:pathLst>
               <a:path w="583" h="583">
                 <a:moveTo>
-                  <a:pt x="583" y="291"/>
+                  <a:pt x="583" y="292"/>
                 </a:moveTo>
                 <a:cubicBezTo>
-                  <a:pt x="583" y="310"/>
-                  <a:pt x="582" y="329"/>
+                  <a:pt x="583" y="311"/>
+                  <a:pt x="582" y="330"/>
                   <a:pt x="578" y="348"/>
                 </a:cubicBezTo>
                 <a:cubicBezTo>
@@ -11823,27 +11780,27 @@
                   <a:pt x="6" y="348"/>
                 </a:cubicBezTo>
                 <a:cubicBezTo>
-                  <a:pt x="2" y="329"/>
-                  <a:pt x="0" y="310"/>
-                  <a:pt x="0" y="291"/>
-                </a:cubicBezTo>
-                <a:cubicBezTo>
-                  <a:pt x="0" y="272"/>
-                  <a:pt x="2" y="253"/>
-                  <a:pt x="6" y="234"/>
-                </a:cubicBezTo>
-                <a:cubicBezTo>
-                  <a:pt x="10" y="215"/>
-                  <a:pt x="15" y="197"/>
-                  <a:pt x="22" y="179"/>
-                </a:cubicBezTo>
-                <a:cubicBezTo>
-                  <a:pt x="30" y="162"/>
-                  <a:pt x="39" y="145"/>
-                  <a:pt x="49" y="129"/>
-                </a:cubicBezTo>
-                <a:cubicBezTo>
-                  <a:pt x="60" y="113"/>
+                  <a:pt x="2" y="330"/>
+                  <a:pt x="0" y="311"/>
+                  <a:pt x="0" y="292"/>
+                </a:cubicBezTo>
+                <a:cubicBezTo>
+                  <a:pt x="0" y="273"/>
+                  <a:pt x="2" y="254"/>
+                  <a:pt x="6" y="235"/>
+                </a:cubicBezTo>
+                <a:cubicBezTo>
+                  <a:pt x="10" y="216"/>
+                  <a:pt x="15" y="198"/>
+                  <a:pt x="22" y="180"/>
+                </a:cubicBezTo>
+                <a:cubicBezTo>
+                  <a:pt x="30" y="163"/>
+                  <a:pt x="39" y="146"/>
+                  <a:pt x="49" y="130"/>
+                </a:cubicBezTo>
+                <a:cubicBezTo>
+                  <a:pt x="60" y="114"/>
                   <a:pt x="72" y="98"/>
                   <a:pt x="86" y="85"/>
                 </a:cubicBezTo>
@@ -11889,23 +11846,23 @@
                 </a:cubicBezTo>
                 <a:cubicBezTo>
                   <a:pt x="512" y="98"/>
-                  <a:pt x="524" y="113"/>
-                  <a:pt x="534" y="129"/>
-                </a:cubicBezTo>
-                <a:cubicBezTo>
-                  <a:pt x="545" y="145"/>
-                  <a:pt x="554" y="162"/>
-                  <a:pt x="561" y="179"/>
-                </a:cubicBezTo>
-                <a:cubicBezTo>
-                  <a:pt x="569" y="197"/>
-                  <a:pt x="574" y="215"/>
-                  <a:pt x="578" y="234"/>
-                </a:cubicBezTo>
-                <a:cubicBezTo>
-                  <a:pt x="582" y="253"/>
-                  <a:pt x="583" y="272"/>
-                  <a:pt x="583" y="291"/>
+                  <a:pt x="524" y="114"/>
+                  <a:pt x="534" y="130"/>
+                </a:cubicBezTo>
+                <a:cubicBezTo>
+                  <a:pt x="545" y="146"/>
+                  <a:pt x="554" y="163"/>
+                  <a:pt x="561" y="180"/>
+                </a:cubicBezTo>
+                <a:cubicBezTo>
+                  <a:pt x="569" y="198"/>
+                  <a:pt x="574" y="216"/>
+                  <a:pt x="578" y="235"/>
+                </a:cubicBezTo>
+                <a:cubicBezTo>
+                  <a:pt x="582" y="254"/>
+                  <a:pt x="583" y="273"/>
+                  <a:pt x="583" y="292"/>
                 </a:cubicBezTo>
                 <a:close/>
               </a:path>
@@ -11934,13 +11891,13 @@
       </p:sp>
       <p:sp>
         <p:nvSpPr>
-          <p:cNvPr id="165" name=""/>
+          <p:cNvPr id="164" name=""/>
           <p:cNvSpPr txBox="1"/>
           <p:nvPr/>
         </p:nvSpPr>
         <p:spPr>
           <a:xfrm>
-            <a:off x="619200" y="2240640"/>
+            <a:off x="619200" y="2116800"/>
             <a:ext cx="1248840" cy="153000"/>
           </a:xfrm>
           <a:prstGeom prst="rect">
@@ -11977,13 +11934,13 @@
       </p:sp>
       <p:sp>
         <p:nvSpPr>
-          <p:cNvPr id="166" name=""/>
+          <p:cNvPr id="165" name=""/>
           <p:cNvSpPr txBox="1"/>
           <p:nvPr/>
         </p:nvSpPr>
         <p:spPr>
           <a:xfrm>
-            <a:off x="706680" y="2532240"/>
+            <a:off x="706680" y="2408400"/>
             <a:ext cx="113760" cy="134640"/>
           </a:xfrm>
           <a:prstGeom prst="rect">
@@ -12020,14 +11977,14 @@
       </p:sp>
       <p:sp>
         <p:nvSpPr>
-          <p:cNvPr id="167" name=""/>
+          <p:cNvPr id="166" name=""/>
           <p:cNvSpPr/>
           <p:nvPr/>
         </p:nvSpPr>
         <p:spPr>
           <a:xfrm>
-            <a:off x="618840" y="2761920"/>
-            <a:ext cx="209880" cy="209880"/>
+            <a:off x="618840" y="2638080"/>
+            <a:ext cx="209880" cy="210240"/>
           </a:xfrm>
           <a:custGeom>
             <a:avLst/>
@@ -12035,33 +11992,33 @@
             <a:ahLst/>
             <a:rect l="0" t="0" r="r" b="b"/>
             <a:pathLst>
-              <a:path w="583" h="583">
+              <a:path w="583" h="584">
                 <a:moveTo>
-                  <a:pt x="583" y="292"/>
+                  <a:pt x="583" y="291"/>
                 </a:moveTo>
                 <a:cubicBezTo>
-                  <a:pt x="583" y="312"/>
+                  <a:pt x="583" y="311"/>
                   <a:pt x="582" y="330"/>
-                  <a:pt x="578" y="349"/>
-                </a:cubicBezTo>
-                <a:cubicBezTo>
-                  <a:pt x="574" y="368"/>
-                  <a:pt x="569" y="386"/>
-                  <a:pt x="561" y="404"/>
+                  <a:pt x="578" y="348"/>
+                </a:cubicBezTo>
+                <a:cubicBezTo>
+                  <a:pt x="574" y="367"/>
+                  <a:pt x="569" y="385"/>
+                  <a:pt x="561" y="403"/>
                 </a:cubicBezTo>
                 <a:cubicBezTo>
                   <a:pt x="554" y="421"/>
-                  <a:pt x="545" y="438"/>
-                  <a:pt x="534" y="454"/>
-                </a:cubicBezTo>
-                <a:cubicBezTo>
-                  <a:pt x="524" y="470"/>
-                  <a:pt x="512" y="485"/>
-                  <a:pt x="498" y="498"/>
-                </a:cubicBezTo>
-                <a:cubicBezTo>
-                  <a:pt x="485" y="512"/>
-                  <a:pt x="470" y="524"/>
+                  <a:pt x="545" y="437"/>
+                  <a:pt x="534" y="453"/>
+                </a:cubicBezTo>
+                <a:cubicBezTo>
+                  <a:pt x="524" y="469"/>
+                  <a:pt x="512" y="484"/>
+                  <a:pt x="498" y="497"/>
+                </a:cubicBezTo>
+                <a:cubicBezTo>
+                  <a:pt x="485" y="511"/>
+                  <a:pt x="470" y="523"/>
                   <a:pt x="454" y="534"/>
                 </a:cubicBezTo>
                 <a:cubicBezTo>
@@ -12076,11 +12033,11 @@
                 </a:cubicBezTo>
                 <a:cubicBezTo>
                   <a:pt x="330" y="582"/>
-                  <a:pt x="310" y="583"/>
-                  <a:pt x="291" y="583"/>
-                </a:cubicBezTo>
-                <a:cubicBezTo>
-                  <a:pt x="272" y="583"/>
+                  <a:pt x="310" y="584"/>
+                  <a:pt x="291" y="584"/>
+                </a:cubicBezTo>
+                <a:cubicBezTo>
+                  <a:pt x="272" y="584"/>
                   <a:pt x="253" y="582"/>
                   <a:pt x="235" y="578"/>
                 </a:cubicBezTo>
@@ -12095,38 +12052,38 @@
                   <a:pt x="130" y="534"/>
                 </a:cubicBezTo>
                 <a:cubicBezTo>
-                  <a:pt x="114" y="524"/>
-                  <a:pt x="99" y="512"/>
-                  <a:pt x="86" y="498"/>
-                </a:cubicBezTo>
-                <a:cubicBezTo>
-                  <a:pt x="72" y="485"/>
-                  <a:pt x="60" y="470"/>
-                  <a:pt x="49" y="454"/>
-                </a:cubicBezTo>
-                <a:cubicBezTo>
-                  <a:pt x="39" y="438"/>
+                  <a:pt x="114" y="523"/>
+                  <a:pt x="99" y="511"/>
+                  <a:pt x="86" y="497"/>
+                </a:cubicBezTo>
+                <a:cubicBezTo>
+                  <a:pt x="72" y="484"/>
+                  <a:pt x="60" y="469"/>
+                  <a:pt x="49" y="453"/>
+                </a:cubicBezTo>
+                <a:cubicBezTo>
+                  <a:pt x="39" y="437"/>
                   <a:pt x="30" y="421"/>
-                  <a:pt x="22" y="404"/>
-                </a:cubicBezTo>
-                <a:cubicBezTo>
-                  <a:pt x="15" y="386"/>
-                  <a:pt x="10" y="368"/>
-                  <a:pt x="6" y="349"/>
+                  <a:pt x="22" y="403"/>
+                </a:cubicBezTo>
+                <a:cubicBezTo>
+                  <a:pt x="15" y="385"/>
+                  <a:pt x="10" y="367"/>
+                  <a:pt x="6" y="348"/>
                 </a:cubicBezTo>
                 <a:cubicBezTo>
                   <a:pt x="2" y="330"/>
-                  <a:pt x="0" y="312"/>
-                  <a:pt x="0" y="292"/>
-                </a:cubicBezTo>
-                <a:cubicBezTo>
-                  <a:pt x="0" y="273"/>
-                  <a:pt x="2" y="254"/>
-                  <a:pt x="6" y="236"/>
-                </a:cubicBezTo>
-                <a:cubicBezTo>
-                  <a:pt x="10" y="217"/>
-                  <a:pt x="15" y="199"/>
+                  <a:pt x="0" y="311"/>
+                  <a:pt x="0" y="291"/>
+                </a:cubicBezTo>
+                <a:cubicBezTo>
+                  <a:pt x="0" y="272"/>
+                  <a:pt x="2" y="253"/>
+                  <a:pt x="6" y="235"/>
+                </a:cubicBezTo>
+                <a:cubicBezTo>
+                  <a:pt x="10" y="216"/>
+                  <a:pt x="15" y="198"/>
                   <a:pt x="22" y="180"/>
                 </a:cubicBezTo>
                 <a:cubicBezTo>
@@ -12142,7 +12099,7 @@
                 <a:cubicBezTo>
                   <a:pt x="99" y="72"/>
                   <a:pt x="114" y="60"/>
-                  <a:pt x="130" y="49"/>
+                  <a:pt x="130" y="50"/>
                 </a:cubicBezTo>
                 <a:cubicBezTo>
                   <a:pt x="146" y="39"/>
@@ -12172,7 +12129,7 @@
                 <a:cubicBezTo>
                   <a:pt x="421" y="30"/>
                   <a:pt x="438" y="39"/>
-                  <a:pt x="454" y="49"/>
+                  <a:pt x="454" y="50"/>
                 </a:cubicBezTo>
                 <a:cubicBezTo>
                   <a:pt x="470" y="60"/>
@@ -12190,14 +12147,14 @@
                   <a:pt x="561" y="180"/>
                 </a:cubicBezTo>
                 <a:cubicBezTo>
-                  <a:pt x="569" y="199"/>
-                  <a:pt x="574" y="217"/>
-                  <a:pt x="578" y="236"/>
-                </a:cubicBezTo>
-                <a:cubicBezTo>
-                  <a:pt x="582" y="254"/>
-                  <a:pt x="583" y="273"/>
-                  <a:pt x="583" y="292"/>
+                  <a:pt x="569" y="198"/>
+                  <a:pt x="574" y="216"/>
+                  <a:pt x="578" y="235"/>
+                </a:cubicBezTo>
+                <a:cubicBezTo>
+                  <a:pt x="582" y="253"/>
+                  <a:pt x="583" y="272"/>
+                  <a:pt x="583" y="291"/>
                 </a:cubicBezTo>
                 <a:close/>
               </a:path>
@@ -12226,13 +12183,13 @@
       </p:sp>
       <p:sp>
         <p:nvSpPr>
-          <p:cNvPr id="168" name=""/>
+          <p:cNvPr id="167" name=""/>
           <p:cNvSpPr txBox="1"/>
           <p:nvPr/>
         </p:nvSpPr>
         <p:spPr>
           <a:xfrm>
-            <a:off x="832320" y="2521440"/>
+            <a:off x="832320" y="2397600"/>
             <a:ext cx="3612600" cy="149760"/>
           </a:xfrm>
           <a:prstGeom prst="rect">
@@ -12289,13 +12246,13 @@
       </p:sp>
       <p:sp>
         <p:nvSpPr>
-          <p:cNvPr id="169" name=""/>
+          <p:cNvPr id="168" name=""/>
           <p:cNvSpPr txBox="1"/>
           <p:nvPr/>
         </p:nvSpPr>
         <p:spPr>
           <a:xfrm>
-            <a:off x="692280" y="2799000"/>
+            <a:off x="692280" y="2675160"/>
             <a:ext cx="113760" cy="134640"/>
           </a:xfrm>
           <a:prstGeom prst="rect">
@@ -12332,13 +12289,13 @@
       </p:sp>
       <p:sp>
         <p:nvSpPr>
-          <p:cNvPr id="170" name=""/>
+          <p:cNvPr id="169" name=""/>
           <p:cNvSpPr/>
           <p:nvPr/>
         </p:nvSpPr>
         <p:spPr>
           <a:xfrm>
-            <a:off x="618840" y="3028680"/>
+            <a:off x="618840" y="2904840"/>
             <a:ext cx="209880" cy="209880"/>
           </a:xfrm>
           <a:custGeom>
@@ -12349,15 +12306,15 @@
             <a:pathLst>
               <a:path w="583" h="583">
                 <a:moveTo>
-                  <a:pt x="583" y="292"/>
+                  <a:pt x="583" y="291"/>
                 </a:moveTo>
                 <a:cubicBezTo>
-                  <a:pt x="583" y="311"/>
-                  <a:pt x="582" y="330"/>
-                  <a:pt x="578" y="349"/>
-                </a:cubicBezTo>
-                <a:cubicBezTo>
-                  <a:pt x="574" y="368"/>
+                  <a:pt x="583" y="310"/>
+                  <a:pt x="582" y="329"/>
+                  <a:pt x="578" y="348"/>
+                </a:cubicBezTo>
+                <a:cubicBezTo>
+                  <a:pt x="574" y="367"/>
                   <a:pt x="569" y="386"/>
                   <a:pt x="561" y="404"/>
                 </a:cubicBezTo>
@@ -12382,23 +12339,23 @@
                   <a:pt x="404" y="561"/>
                 </a:cubicBezTo>
                 <a:cubicBezTo>
-                  <a:pt x="386" y="568"/>
+                  <a:pt x="386" y="569"/>
                   <a:pt x="368" y="574"/>
                   <a:pt x="349" y="578"/>
                 </a:cubicBezTo>
                 <a:cubicBezTo>
-                  <a:pt x="330" y="581"/>
+                  <a:pt x="330" y="582"/>
                   <a:pt x="310" y="583"/>
                   <a:pt x="291" y="583"/>
                 </a:cubicBezTo>
                 <a:cubicBezTo>
                   <a:pt x="272" y="583"/>
-                  <a:pt x="253" y="581"/>
+                  <a:pt x="253" y="582"/>
                   <a:pt x="235" y="578"/>
                 </a:cubicBezTo>
                 <a:cubicBezTo>
                   <a:pt x="216" y="574"/>
-                  <a:pt x="198" y="568"/>
+                  <a:pt x="198" y="569"/>
                   <a:pt x="180" y="561"/>
                 </a:cubicBezTo>
                 <a:cubicBezTo>
@@ -12423,42 +12380,42 @@
                 </a:cubicBezTo>
                 <a:cubicBezTo>
                   <a:pt x="15" y="386"/>
-                  <a:pt x="10" y="368"/>
-                  <a:pt x="6" y="349"/>
-                </a:cubicBezTo>
-                <a:cubicBezTo>
-                  <a:pt x="2" y="330"/>
-                  <a:pt x="0" y="311"/>
-                  <a:pt x="0" y="292"/>
-                </a:cubicBezTo>
-                <a:cubicBezTo>
-                  <a:pt x="0" y="273"/>
-                  <a:pt x="2" y="254"/>
-                  <a:pt x="6" y="236"/>
-                </a:cubicBezTo>
-                <a:cubicBezTo>
-                  <a:pt x="10" y="217"/>
-                  <a:pt x="15" y="199"/>
-                  <a:pt x="22" y="181"/>
-                </a:cubicBezTo>
-                <a:cubicBezTo>
-                  <a:pt x="30" y="163"/>
+                  <a:pt x="10" y="367"/>
+                  <a:pt x="6" y="348"/>
+                </a:cubicBezTo>
+                <a:cubicBezTo>
+                  <a:pt x="2" y="329"/>
+                  <a:pt x="0" y="310"/>
+                  <a:pt x="0" y="291"/>
+                </a:cubicBezTo>
+                <a:cubicBezTo>
+                  <a:pt x="0" y="272"/>
+                  <a:pt x="2" y="253"/>
+                  <a:pt x="6" y="235"/>
+                </a:cubicBezTo>
+                <a:cubicBezTo>
+                  <a:pt x="10" y="216"/>
+                  <a:pt x="15" y="198"/>
+                  <a:pt x="22" y="180"/>
+                </a:cubicBezTo>
+                <a:cubicBezTo>
+                  <a:pt x="30" y="162"/>
                   <a:pt x="39" y="146"/>
-                  <a:pt x="49" y="131"/>
-                </a:cubicBezTo>
-                <a:cubicBezTo>
-                  <a:pt x="60" y="115"/>
-                  <a:pt x="72" y="100"/>
+                  <a:pt x="49" y="130"/>
+                </a:cubicBezTo>
+                <a:cubicBezTo>
+                  <a:pt x="60" y="114"/>
+                  <a:pt x="72" y="99"/>
                   <a:pt x="86" y="86"/>
                 </a:cubicBezTo>
                 <a:cubicBezTo>
-                  <a:pt x="99" y="73"/>
-                  <a:pt x="114" y="61"/>
-                  <a:pt x="130" y="50"/>
-                </a:cubicBezTo>
-                <a:cubicBezTo>
-                  <a:pt x="146" y="40"/>
-                  <a:pt x="162" y="31"/>
+                  <a:pt x="99" y="72"/>
+                  <a:pt x="114" y="60"/>
+                  <a:pt x="130" y="49"/>
+                </a:cubicBezTo>
+                <a:cubicBezTo>
+                  <a:pt x="146" y="39"/>
+                  <a:pt x="162" y="30"/>
                   <a:pt x="180" y="22"/>
                 </a:cubicBezTo>
                 <a:cubicBezTo>
@@ -12482,34 +12439,34 @@
                   <a:pt x="404" y="22"/>
                 </a:cubicBezTo>
                 <a:cubicBezTo>
-                  <a:pt x="421" y="31"/>
-                  <a:pt x="438" y="40"/>
-                  <a:pt x="454" y="50"/>
-                </a:cubicBezTo>
-                <a:cubicBezTo>
-                  <a:pt x="470" y="61"/>
-                  <a:pt x="485" y="73"/>
+                  <a:pt x="421" y="30"/>
+                  <a:pt x="438" y="39"/>
+                  <a:pt x="454" y="49"/>
+                </a:cubicBezTo>
+                <a:cubicBezTo>
+                  <a:pt x="470" y="60"/>
+                  <a:pt x="485" y="72"/>
                   <a:pt x="498" y="86"/>
                 </a:cubicBezTo>
                 <a:cubicBezTo>
-                  <a:pt x="512" y="100"/>
-                  <a:pt x="524" y="115"/>
-                  <a:pt x="534" y="131"/>
+                  <a:pt x="512" y="99"/>
+                  <a:pt x="524" y="114"/>
+                  <a:pt x="534" y="130"/>
                 </a:cubicBezTo>
                 <a:cubicBezTo>
                   <a:pt x="545" y="146"/>
-                  <a:pt x="554" y="163"/>
-                  <a:pt x="561" y="181"/>
-                </a:cubicBezTo>
-                <a:cubicBezTo>
-                  <a:pt x="569" y="199"/>
-                  <a:pt x="574" y="217"/>
-                  <a:pt x="578" y="236"/>
-                </a:cubicBezTo>
-                <a:cubicBezTo>
-                  <a:pt x="582" y="254"/>
-                  <a:pt x="583" y="273"/>
-                  <a:pt x="583" y="292"/>
+                  <a:pt x="554" y="162"/>
+                  <a:pt x="561" y="180"/>
+                </a:cubicBezTo>
+                <a:cubicBezTo>
+                  <a:pt x="569" y="198"/>
+                  <a:pt x="574" y="216"/>
+                  <a:pt x="578" y="235"/>
+                </a:cubicBezTo>
+                <a:cubicBezTo>
+                  <a:pt x="582" y="253"/>
+                  <a:pt x="583" y="272"/>
+                  <a:pt x="583" y="291"/>
                 </a:cubicBezTo>
                 <a:close/>
               </a:path>
@@ -12538,13 +12495,13 @@
       </p:sp>
       <p:sp>
         <p:nvSpPr>
-          <p:cNvPr id="171" name=""/>
+          <p:cNvPr id="170" name=""/>
           <p:cNvSpPr txBox="1"/>
           <p:nvPr/>
         </p:nvSpPr>
         <p:spPr>
           <a:xfrm>
-            <a:off x="832320" y="2788200"/>
+            <a:off x="832320" y="2664360"/>
             <a:ext cx="3317400" cy="149760"/>
           </a:xfrm>
           <a:prstGeom prst="rect">
@@ -12601,13 +12558,13 @@
       </p:sp>
       <p:sp>
         <p:nvSpPr>
-          <p:cNvPr id="172" name=""/>
+          <p:cNvPr id="171" name=""/>
           <p:cNvSpPr txBox="1"/>
           <p:nvPr/>
         </p:nvSpPr>
         <p:spPr>
           <a:xfrm>
-            <a:off x="692280" y="3065760"/>
+            <a:off x="692280" y="2941920"/>
             <a:ext cx="113760" cy="134640"/>
           </a:xfrm>
           <a:prstGeom prst="rect">
@@ -12644,13 +12601,13 @@
       </p:sp>
       <p:sp>
         <p:nvSpPr>
-          <p:cNvPr id="173" name=""/>
+          <p:cNvPr id="172" name=""/>
           <p:cNvSpPr txBox="1"/>
           <p:nvPr/>
         </p:nvSpPr>
         <p:spPr>
           <a:xfrm>
-            <a:off x="832320" y="3054960"/>
+            <a:off x="832320" y="2931120"/>
             <a:ext cx="3810600" cy="149760"/>
           </a:xfrm>
           <a:prstGeom prst="rect">
@@ -12707,14 +12664,14 @@
       </p:sp>
       <p:sp>
         <p:nvSpPr>
-          <p:cNvPr id="174" name=""/>
+          <p:cNvPr id="173" name=""/>
           <p:cNvSpPr txBox="1"/>
           <p:nvPr/>
         </p:nvSpPr>
         <p:spPr>
           <a:xfrm>
-            <a:off x="619200" y="3357720"/>
-            <a:ext cx="3813840" cy="149760"/>
+            <a:off x="619200" y="3233880"/>
+            <a:ext cx="4303080" cy="149760"/>
           </a:xfrm>
           <a:prstGeom prst="rect">
             <a:avLst/>
@@ -12737,7 +12694,7 @@
                 <a:latin typeface="Arial"/>
                 <a:ea typeface="Arial"/>
               </a:rPr>
-              <a:t>Daaronder (de les) wisselt OKx niet uit; wie dat wil, lost het</a:t>
+              <a:t>De les blijft bij de instelling: die regelt het functioneel of in de klas,</a:t>
             </a:r>
             <a:endParaRPr b="0" lang="en-US" sz="1010" spc="-1" strike="noStrike">
               <a:solidFill>
@@ -12750,14 +12707,14 @@
       </p:sp>
       <p:sp>
         <p:nvSpPr>
-          <p:cNvPr id="175" name=""/>
+          <p:cNvPr id="174" name=""/>
           <p:cNvSpPr/>
           <p:nvPr/>
         </p:nvSpPr>
         <p:spPr>
           <a:xfrm>
-            <a:off x="4762440" y="1285560"/>
-            <a:ext cx="4115160" cy="2257920"/>
+            <a:off x="4762440" y="1409400"/>
+            <a:ext cx="4115160" cy="2267280"/>
           </a:xfrm>
           <a:custGeom>
             <a:avLst/>
@@ -12765,7 +12722,7 @@
             <a:ahLst/>
             <a:rect l="0" t="0" r="r" b="b"/>
             <a:pathLst>
-              <a:path w="11431" h="6272">
+              <a:path w="11431" h="6298">
                 <a:moveTo>
                   <a:pt x="0" y="0"/>
                 </a:moveTo>
@@ -12773,10 +12730,10 @@
                   <a:pt x="11431" y="0"/>
                 </a:lnTo>
                 <a:lnTo>
-                  <a:pt x="11431" y="6272"/>
-                </a:lnTo>
-                <a:lnTo>
-                  <a:pt x="0" y="6272"/>
+                  <a:pt x="11431" y="6298"/>
+                </a:lnTo>
+                <a:lnTo>
+                  <a:pt x="0" y="6298"/>
                 </a:lnTo>
                 <a:lnTo>
                   <a:pt x="0" y="0"/>
@@ -12808,13 +12765,13 @@
       </p:sp>
       <p:sp>
         <p:nvSpPr>
-          <p:cNvPr id="176" name=""/>
+          <p:cNvPr id="175" name=""/>
           <p:cNvSpPr/>
           <p:nvPr/>
         </p:nvSpPr>
         <p:spPr>
           <a:xfrm>
-            <a:off x="4762440" y="1285560"/>
+            <a:off x="4762440" y="1409400"/>
             <a:ext cx="4115160" cy="38520"/>
           </a:xfrm>
           <a:custGeom>
@@ -12866,13 +12823,13 @@
       </p:sp>
       <p:sp>
         <p:nvSpPr>
-          <p:cNvPr id="177" name=""/>
+          <p:cNvPr id="176" name=""/>
           <p:cNvSpPr/>
           <p:nvPr/>
         </p:nvSpPr>
         <p:spPr>
           <a:xfrm>
-            <a:off x="4762440" y="3533760"/>
+            <a:off x="4762440" y="3666960"/>
             <a:ext cx="4115160" cy="9720"/>
           </a:xfrm>
           <a:custGeom>
@@ -12924,14 +12881,14 @@
       </p:sp>
       <p:sp>
         <p:nvSpPr>
-          <p:cNvPr id="178" name=""/>
+          <p:cNvPr id="177" name=""/>
           <p:cNvSpPr/>
           <p:nvPr/>
         </p:nvSpPr>
         <p:spPr>
           <a:xfrm>
-            <a:off x="8867520" y="1285560"/>
-            <a:ext cx="10080" cy="2257920"/>
+            <a:off x="8867520" y="1409400"/>
+            <a:ext cx="10080" cy="2267280"/>
           </a:xfrm>
           <a:custGeom>
             <a:avLst/>
@@ -12939,15 +12896,15 @@
             <a:ahLst/>
             <a:rect l="0" t="0" r="r" b="b"/>
             <a:pathLst>
-              <a:path w="28" h="6272">
+              <a:path w="28" h="6298">
                 <a:moveTo>
                   <a:pt x="0" y="106"/>
                 </a:moveTo>
                 <a:lnTo>
-                  <a:pt x="0" y="6272"/>
-                </a:lnTo>
-                <a:lnTo>
-                  <a:pt x="28" y="6272"/>
+                  <a:pt x="0" y="6298"/>
+                </a:lnTo>
+                <a:lnTo>
+                  <a:pt x="28" y="6298"/>
                 </a:lnTo>
                 <a:lnTo>
                   <a:pt x="28" y="0"/>
@@ -12982,14 +12939,14 @@
       </p:sp>
       <p:sp>
         <p:nvSpPr>
-          <p:cNvPr id="179" name=""/>
+          <p:cNvPr id="178" name=""/>
           <p:cNvSpPr/>
           <p:nvPr/>
         </p:nvSpPr>
         <p:spPr>
           <a:xfrm>
-            <a:off x="4762440" y="1285560"/>
-            <a:ext cx="9720" cy="2257920"/>
+            <a:off x="4762440" y="1409400"/>
+            <a:ext cx="9720" cy="2267280"/>
           </a:xfrm>
           <a:custGeom>
             <a:avLst/>
@@ -12997,15 +12954,15 @@
             <a:ahLst/>
             <a:rect l="0" t="0" r="r" b="b"/>
             <a:pathLst>
-              <a:path w="27" h="6272">
+              <a:path w="27" h="6298">
                 <a:moveTo>
                   <a:pt x="0" y="0"/>
                 </a:moveTo>
                 <a:lnTo>
-                  <a:pt x="0" y="6272"/>
-                </a:lnTo>
-                <a:lnTo>
-                  <a:pt x="27" y="6272"/>
+                  <a:pt x="0" y="6298"/>
+                </a:lnTo>
+                <a:lnTo>
+                  <a:pt x="27" y="6298"/>
                 </a:lnTo>
                 <a:lnTo>
                   <a:pt x="27" y="106"/>
@@ -13040,14 +12997,14 @@
       </p:sp>
       <p:sp>
         <p:nvSpPr>
-          <p:cNvPr id="180" name=""/>
+          <p:cNvPr id="179" name=""/>
           <p:cNvSpPr txBox="1"/>
           <p:nvPr/>
         </p:nvSpPr>
         <p:spPr>
           <a:xfrm>
-            <a:off x="619200" y="3548160"/>
-            <a:ext cx="3845880" cy="149760"/>
+            <a:off x="619200" y="3424680"/>
+            <a:ext cx="3796920" cy="149760"/>
           </a:xfrm>
           <a:prstGeom prst="rect">
             <a:avLst/>
@@ -13070,7 +13027,7 @@
                 <a:latin typeface="Arial"/>
                 <a:ea typeface="Arial"/>
               </a:rPr>
-              <a:t>functioneel of in de klas op, niet via de standaardkoppeling.</a:t>
+              <a:t>de standaardkoppelingen gaan tot en met de leeractiviteit.</a:t>
             </a:r>
             <a:endParaRPr b="0" lang="en-US" sz="1010" spc="-1" strike="noStrike">
               <a:solidFill>
@@ -13083,13 +13040,13 @@
       </p:sp>
       <p:sp>
         <p:nvSpPr>
-          <p:cNvPr id="181" name=""/>
+          <p:cNvPr id="180" name=""/>
           <p:cNvSpPr txBox="1"/>
           <p:nvPr/>
         </p:nvSpPr>
         <p:spPr>
           <a:xfrm>
-            <a:off x="4928040" y="1496880"/>
+            <a:off x="4928040" y="1620720"/>
             <a:ext cx="3501360" cy="178920"/>
           </a:xfrm>
           <a:prstGeom prst="rect">
@@ -13126,13 +13083,13 @@
       </p:sp>
       <p:sp>
         <p:nvSpPr>
-          <p:cNvPr id="182" name=""/>
+          <p:cNvPr id="181" name=""/>
           <p:cNvSpPr txBox="1"/>
           <p:nvPr/>
         </p:nvSpPr>
         <p:spPr>
           <a:xfrm>
-            <a:off x="4928040" y="1792800"/>
+            <a:off x="4928040" y="1916640"/>
             <a:ext cx="4220640" cy="153000"/>
           </a:xfrm>
           <a:prstGeom prst="rect">
@@ -13169,13 +13126,13 @@
       </p:sp>
       <p:sp>
         <p:nvSpPr>
-          <p:cNvPr id="183" name=""/>
+          <p:cNvPr id="182" name=""/>
           <p:cNvSpPr txBox="1"/>
           <p:nvPr/>
         </p:nvSpPr>
         <p:spPr>
           <a:xfrm>
-            <a:off x="4928040" y="1992960"/>
+            <a:off x="4928040" y="2116800"/>
             <a:ext cx="3815280" cy="153000"/>
           </a:xfrm>
           <a:prstGeom prst="rect">
@@ -13212,13 +13169,13 @@
       </p:sp>
       <p:sp>
         <p:nvSpPr>
-          <p:cNvPr id="184" name=""/>
+          <p:cNvPr id="183" name=""/>
           <p:cNvSpPr txBox="1"/>
           <p:nvPr/>
         </p:nvSpPr>
         <p:spPr>
           <a:xfrm>
-            <a:off x="4928040" y="2193120"/>
+            <a:off x="4928040" y="2316600"/>
             <a:ext cx="1578240" cy="153000"/>
           </a:xfrm>
           <a:prstGeom prst="rect">
@@ -13255,13 +13212,13 @@
       </p:sp>
       <p:sp>
         <p:nvSpPr>
-          <p:cNvPr id="185" name=""/>
+          <p:cNvPr id="184" name=""/>
           <p:cNvSpPr txBox="1"/>
           <p:nvPr/>
         </p:nvSpPr>
         <p:spPr>
           <a:xfrm>
-            <a:off x="4928040" y="2481480"/>
+            <a:off x="4928040" y="2605320"/>
             <a:ext cx="4249800" cy="149760"/>
           </a:xfrm>
           <a:prstGeom prst="rect">
@@ -13298,13 +13255,13 @@
       </p:sp>
       <p:sp>
         <p:nvSpPr>
-          <p:cNvPr id="186" name=""/>
+          <p:cNvPr id="185" name=""/>
           <p:cNvSpPr txBox="1"/>
           <p:nvPr/>
         </p:nvSpPr>
         <p:spPr>
           <a:xfrm>
-            <a:off x="4928040" y="2671920"/>
+            <a:off x="4928040" y="2795760"/>
             <a:ext cx="4112640" cy="149760"/>
           </a:xfrm>
           <a:prstGeom prst="rect">
@@ -13341,13 +13298,13 @@
       </p:sp>
       <p:sp>
         <p:nvSpPr>
-          <p:cNvPr id="187" name=""/>
+          <p:cNvPr id="186" name=""/>
           <p:cNvSpPr txBox="1"/>
           <p:nvPr/>
         </p:nvSpPr>
         <p:spPr>
           <a:xfrm>
-            <a:off x="4928040" y="2862360"/>
+            <a:off x="4928040" y="2986200"/>
             <a:ext cx="3243960" cy="149760"/>
           </a:xfrm>
           <a:prstGeom prst="rect">
@@ -13384,13 +13341,13 @@
       </p:sp>
       <p:sp>
         <p:nvSpPr>
-          <p:cNvPr id="188" name=""/>
+          <p:cNvPr id="187" name=""/>
           <p:cNvSpPr txBox="1"/>
           <p:nvPr/>
         </p:nvSpPr>
         <p:spPr>
           <a:xfrm>
-            <a:off x="4928040" y="3053160"/>
+            <a:off x="4928040" y="3177000"/>
             <a:ext cx="3806280" cy="149760"/>
           </a:xfrm>
           <a:prstGeom prst="rect">
@@ -13427,14 +13384,14 @@
       </p:sp>
       <p:sp>
         <p:nvSpPr>
-          <p:cNvPr id="189" name=""/>
+          <p:cNvPr id="188" name=""/>
           <p:cNvSpPr/>
           <p:nvPr/>
         </p:nvSpPr>
         <p:spPr>
           <a:xfrm>
-            <a:off x="456840" y="3971880"/>
-            <a:ext cx="8420760" cy="628920"/>
+            <a:off x="456840" y="3848040"/>
+            <a:ext cx="8420760" cy="619200"/>
           </a:xfrm>
           <a:custGeom>
             <a:avLst/>
@@ -13442,7 +13399,7 @@
             <a:ahLst/>
             <a:rect l="0" t="0" r="r" b="b"/>
             <a:pathLst>
-              <a:path w="23391" h="1747">
+              <a:path w="23391" h="1720">
                 <a:moveTo>
                   <a:pt x="0" y="0"/>
                 </a:moveTo>
@@ -13450,10 +13407,10 @@
                   <a:pt x="23391" y="0"/>
                 </a:lnTo>
                 <a:lnTo>
-                  <a:pt x="23391" y="1747"/>
-                </a:lnTo>
-                <a:lnTo>
-                  <a:pt x="0" y="1747"/>
+                  <a:pt x="23391" y="1720"/>
+                </a:lnTo>
+                <a:lnTo>
+                  <a:pt x="0" y="1720"/>
                 </a:lnTo>
                 <a:lnTo>
                   <a:pt x="0" y="0"/>
@@ -13485,13 +13442,13 @@
       </p:sp>
       <p:sp>
         <p:nvSpPr>
-          <p:cNvPr id="190" name=""/>
+          <p:cNvPr id="189" name=""/>
           <p:cNvSpPr/>
           <p:nvPr/>
         </p:nvSpPr>
         <p:spPr>
           <a:xfrm>
-            <a:off x="456840" y="3971880"/>
+            <a:off x="456840" y="3848040"/>
             <a:ext cx="8420760" cy="38160"/>
           </a:xfrm>
           <a:custGeom>
@@ -13543,14 +13500,14 @@
       </p:sp>
       <p:sp>
         <p:nvSpPr>
-          <p:cNvPr id="191" name=""/>
+          <p:cNvPr id="190" name=""/>
           <p:cNvSpPr/>
           <p:nvPr/>
         </p:nvSpPr>
         <p:spPr>
           <a:xfrm>
-            <a:off x="456840" y="4590720"/>
-            <a:ext cx="8420760" cy="10440"/>
+            <a:off x="456840" y="4457520"/>
+            <a:ext cx="8420760" cy="9720"/>
           </a:xfrm>
           <a:custGeom>
             <a:avLst/>
@@ -13558,7 +13515,7 @@
             <a:ahLst/>
             <a:rect l="0" t="0" r="r" b="b"/>
             <a:pathLst>
-              <a:path w="23391" h="29">
+              <a:path w="23391" h="27">
                 <a:moveTo>
                   <a:pt x="0" y="0"/>
                 </a:moveTo>
@@ -13566,10 +13523,10 @@
                   <a:pt x="23391" y="0"/>
                 </a:lnTo>
                 <a:lnTo>
-                  <a:pt x="23391" y="29"/>
-                </a:lnTo>
-                <a:lnTo>
-                  <a:pt x="0" y="29"/>
+                  <a:pt x="23391" y="27"/>
+                </a:lnTo>
+                <a:lnTo>
+                  <a:pt x="0" y="27"/>
                 </a:lnTo>
                 <a:lnTo>
                   <a:pt x="0" y="0"/>
@@ -13601,14 +13558,14 @@
       </p:sp>
       <p:sp>
         <p:nvSpPr>
-          <p:cNvPr id="192" name=""/>
+          <p:cNvPr id="191" name=""/>
           <p:cNvSpPr/>
           <p:nvPr/>
         </p:nvSpPr>
         <p:spPr>
           <a:xfrm>
-            <a:off x="8867520" y="3971880"/>
-            <a:ext cx="10080" cy="628920"/>
+            <a:off x="8867520" y="3848040"/>
+            <a:ext cx="10080" cy="619200"/>
           </a:xfrm>
           <a:custGeom>
             <a:avLst/>
@@ -13616,15 +13573,15 @@
             <a:ahLst/>
             <a:rect l="0" t="0" r="r" b="b"/>
             <a:pathLst>
-              <a:path w="28" h="1747">
+              <a:path w="28" h="1720">
                 <a:moveTo>
                   <a:pt x="0" y="105"/>
                 </a:moveTo>
                 <a:lnTo>
-                  <a:pt x="0" y="1747"/>
-                </a:lnTo>
-                <a:lnTo>
-                  <a:pt x="28" y="1747"/>
+                  <a:pt x="0" y="1720"/>
+                </a:lnTo>
+                <a:lnTo>
+                  <a:pt x="28" y="1720"/>
                 </a:lnTo>
                 <a:lnTo>
                   <a:pt x="28" y="0"/>
@@ -13659,14 +13616,14 @@
       </p:sp>
       <p:sp>
         <p:nvSpPr>
-          <p:cNvPr id="193" name=""/>
+          <p:cNvPr id="192" name=""/>
           <p:cNvSpPr/>
           <p:nvPr/>
         </p:nvSpPr>
         <p:spPr>
           <a:xfrm>
-            <a:off x="456840" y="3971880"/>
-            <a:ext cx="10080" cy="628920"/>
+            <a:off x="456840" y="3848040"/>
+            <a:ext cx="10080" cy="619200"/>
           </a:xfrm>
           <a:custGeom>
             <a:avLst/>
@@ -13674,15 +13631,15 @@
             <a:ahLst/>
             <a:rect l="0" t="0" r="r" b="b"/>
             <a:pathLst>
-              <a:path w="28" h="1747">
+              <a:path w="28" h="1720">
                 <a:moveTo>
                   <a:pt x="0" y="0"/>
                 </a:moveTo>
                 <a:lnTo>
-                  <a:pt x="0" y="1747"/>
-                </a:lnTo>
-                <a:lnTo>
-                  <a:pt x="28" y="1747"/>
+                  <a:pt x="0" y="1720"/>
+                </a:lnTo>
+                <a:lnTo>
+                  <a:pt x="28" y="1720"/>
                 </a:lnTo>
                 <a:lnTo>
                   <a:pt x="28" y="105"/>
@@ -13717,13 +13674,13 @@
       </p:sp>
       <p:sp>
         <p:nvSpPr>
-          <p:cNvPr id="194" name=""/>
+          <p:cNvPr id="193" name=""/>
           <p:cNvSpPr txBox="1"/>
           <p:nvPr/>
         </p:nvSpPr>
         <p:spPr>
           <a:xfrm>
-            <a:off x="4928040" y="3243600"/>
+            <a:off x="4928040" y="3376800"/>
             <a:ext cx="3571560" cy="149760"/>
           </a:xfrm>
           <a:prstGeom prst="rect">
@@ -13760,13 +13717,13 @@
       </p:sp>
       <p:sp>
         <p:nvSpPr>
-          <p:cNvPr id="195" name=""/>
+          <p:cNvPr id="194" name=""/>
           <p:cNvSpPr txBox="1"/>
           <p:nvPr/>
         </p:nvSpPr>
         <p:spPr>
           <a:xfrm>
-            <a:off x="619200" y="4120920"/>
+            <a:off x="619200" y="3987360"/>
             <a:ext cx="9300240" cy="160560"/>
           </a:xfrm>
           <a:prstGeom prst="rect">
@@ -13813,7 +13770,7 @@
       </p:sp>
       <p:sp>
         <p:nvSpPr>
-          <p:cNvPr id="196" name=""/>
+          <p:cNvPr id="195" name=""/>
           <p:cNvSpPr/>
           <p:nvPr/>
         </p:nvSpPr>
@@ -13871,13 +13828,13 @@
       </p:sp>
       <p:sp>
         <p:nvSpPr>
-          <p:cNvPr id="197" name=""/>
+          <p:cNvPr id="196" name=""/>
           <p:cNvSpPr txBox="1"/>
           <p:nvPr/>
         </p:nvSpPr>
         <p:spPr>
           <a:xfrm>
-            <a:off x="619200" y="4320720"/>
+            <a:off x="619200" y="4197240"/>
             <a:ext cx="1712160" cy="160560"/>
           </a:xfrm>
           <a:prstGeom prst="rect">
@@ -13944,7 +13901,7 @@
       </p:grpSpPr>
       <p:sp>
         <p:nvSpPr>
-          <p:cNvPr id="198" name=""/>
+          <p:cNvPr id="197" name=""/>
           <p:cNvSpPr/>
           <p:nvPr/>
         </p:nvSpPr>
@@ -14002,7 +13959,7 @@
       </p:sp>
       <p:sp>
         <p:nvSpPr>
-          <p:cNvPr id="199" name=""/>
+          <p:cNvPr id="198" name=""/>
           <p:cNvSpPr/>
           <p:nvPr/>
         </p:nvSpPr>
@@ -14060,7 +14017,7 @@
       </p:sp>
       <p:sp>
         <p:nvSpPr>
-          <p:cNvPr id="200" name=""/>
+          <p:cNvPr id="199" name=""/>
           <p:cNvSpPr/>
           <p:nvPr/>
         </p:nvSpPr>
@@ -14118,7 +14075,7 @@
       </p:sp>
       <p:sp>
         <p:nvSpPr>
-          <p:cNvPr id="201" name=""/>
+          <p:cNvPr id="200" name=""/>
           <p:cNvSpPr/>
           <p:nvPr/>
         </p:nvSpPr>
@@ -14176,7 +14133,7 @@
       </p:sp>
       <p:sp>
         <p:nvSpPr>
-          <p:cNvPr id="202" name=""/>
+          <p:cNvPr id="201" name=""/>
           <p:cNvSpPr/>
           <p:nvPr/>
         </p:nvSpPr>
@@ -14234,7 +14191,7 @@
       </p:sp>
       <p:sp>
         <p:nvSpPr>
-          <p:cNvPr id="203" name=""/>
+          <p:cNvPr id="202" name=""/>
           <p:cNvSpPr/>
           <p:nvPr/>
         </p:nvSpPr>
@@ -14292,7 +14249,7 @@
       </p:sp>
       <p:pic>
         <p:nvPicPr>
-          <p:cNvPr id="204" name="" descr=""/>
+          <p:cNvPr id="203" name="" descr=""/>
           <p:cNvPicPr/>
           <p:nvPr/>
         </p:nvPicPr>
@@ -14315,7 +14272,7 @@
       </p:pic>
       <p:sp>
         <p:nvSpPr>
-          <p:cNvPr id="205" name=""/>
+          <p:cNvPr id="204" name=""/>
           <p:cNvSpPr/>
           <p:nvPr/>
         </p:nvSpPr>
@@ -14373,7 +14330,7 @@
       </p:sp>
       <p:sp>
         <p:nvSpPr>
-          <p:cNvPr id="206" name=""/>
+          <p:cNvPr id="205" name=""/>
           <p:cNvSpPr/>
           <p:nvPr/>
         </p:nvSpPr>
@@ -14431,7 +14388,7 @@
       </p:sp>
       <p:sp>
         <p:nvSpPr>
-          <p:cNvPr id="207" name=""/>
+          <p:cNvPr id="206" name=""/>
           <p:cNvSpPr/>
           <p:nvPr/>
         </p:nvSpPr>
@@ -14489,7 +14446,7 @@
       </p:sp>
       <p:sp>
         <p:nvSpPr>
-          <p:cNvPr id="208" name=""/>
+          <p:cNvPr id="207" name=""/>
           <p:cNvSpPr/>
           <p:nvPr/>
         </p:nvSpPr>
@@ -14547,7 +14504,7 @@
       </p:sp>
       <p:sp>
         <p:nvSpPr>
-          <p:cNvPr id="209" name=""/>
+          <p:cNvPr id="208" name=""/>
           <p:cNvSpPr/>
           <p:nvPr/>
         </p:nvSpPr>
@@ -14607,7 +14564,7 @@
       </p:sp>
       <p:sp>
         <p:nvSpPr>
-          <p:cNvPr id="210" name=""/>
+          <p:cNvPr id="209" name=""/>
           <p:cNvSpPr/>
           <p:nvPr/>
         </p:nvSpPr>
@@ -14667,7 +14624,7 @@
       </p:sp>
       <p:sp>
         <p:nvSpPr>
-          <p:cNvPr id="211" name=""/>
+          <p:cNvPr id="210" name=""/>
           <p:cNvSpPr/>
           <p:nvPr/>
         </p:nvSpPr>
@@ -14727,7 +14684,7 @@
       </p:sp>
       <p:sp>
         <p:nvSpPr>
-          <p:cNvPr id="212" name=""/>
+          <p:cNvPr id="211" name=""/>
           <p:cNvSpPr/>
           <p:nvPr/>
         </p:nvSpPr>
@@ -14787,7 +14744,7 @@
       </p:sp>
       <p:sp>
         <p:nvSpPr>
-          <p:cNvPr id="213" name=""/>
+          <p:cNvPr id="212" name=""/>
           <p:cNvSpPr/>
           <p:nvPr/>
         </p:nvSpPr>
@@ -14847,7 +14804,7 @@
       </p:sp>
       <p:sp>
         <p:nvSpPr>
-          <p:cNvPr id="214" name=""/>
+          <p:cNvPr id="213" name=""/>
           <p:cNvSpPr/>
           <p:nvPr/>
         </p:nvSpPr>
@@ -14907,7 +14864,7 @@
       </p:sp>
       <p:sp>
         <p:nvSpPr>
-          <p:cNvPr id="215" name=""/>
+          <p:cNvPr id="214" name=""/>
           <p:cNvSpPr/>
           <p:nvPr/>
         </p:nvSpPr>
@@ -14967,7 +14924,7 @@
       </p:sp>
       <p:sp>
         <p:nvSpPr>
-          <p:cNvPr id="216" name=""/>
+          <p:cNvPr id="215" name=""/>
           <p:cNvSpPr/>
           <p:nvPr/>
         </p:nvSpPr>
@@ -15027,7 +14984,7 @@
       </p:sp>
       <p:sp>
         <p:nvSpPr>
-          <p:cNvPr id="217" name=""/>
+          <p:cNvPr id="216" name=""/>
           <p:cNvSpPr/>
           <p:nvPr/>
         </p:nvSpPr>
@@ -15087,7 +15044,7 @@
       </p:sp>
       <p:sp>
         <p:nvSpPr>
-          <p:cNvPr id="218" name=""/>
+          <p:cNvPr id="217" name=""/>
           <p:cNvSpPr/>
           <p:nvPr/>
         </p:nvSpPr>
@@ -15147,7 +15104,7 @@
       </p:sp>
       <p:sp>
         <p:nvSpPr>
-          <p:cNvPr id="219" name=""/>
+          <p:cNvPr id="218" name=""/>
           <p:cNvSpPr/>
           <p:nvPr/>
         </p:nvSpPr>
@@ -15207,7 +15164,7 @@
       </p:sp>
       <p:sp>
         <p:nvSpPr>
-          <p:cNvPr id="220" name=""/>
+          <p:cNvPr id="219" name=""/>
           <p:cNvSpPr/>
           <p:nvPr/>
         </p:nvSpPr>
@@ -15267,7 +15224,7 @@
       </p:sp>
       <p:sp>
         <p:nvSpPr>
-          <p:cNvPr id="221" name=""/>
+          <p:cNvPr id="220" name=""/>
           <p:cNvSpPr/>
           <p:nvPr/>
         </p:nvSpPr>
@@ -15327,7 +15284,7 @@
       </p:sp>
       <p:sp>
         <p:nvSpPr>
-          <p:cNvPr id="222" name=""/>
+          <p:cNvPr id="221" name=""/>
           <p:cNvSpPr/>
           <p:nvPr/>
         </p:nvSpPr>
@@ -15387,7 +15344,7 @@
       </p:sp>
       <p:sp>
         <p:nvSpPr>
-          <p:cNvPr id="223" name=""/>
+          <p:cNvPr id="222" name=""/>
           <p:cNvSpPr txBox="1"/>
           <p:nvPr/>
         </p:nvSpPr>
@@ -15430,7 +15387,7 @@
       </p:sp>
       <p:sp>
         <p:nvSpPr>
-          <p:cNvPr id="224" name=""/>
+          <p:cNvPr id="223" name=""/>
           <p:cNvSpPr txBox="1"/>
           <p:nvPr/>
         </p:nvSpPr>
@@ -15473,7 +15430,7 @@
       </p:sp>
       <p:sp>
         <p:nvSpPr>
-          <p:cNvPr id="225" name=""/>
+          <p:cNvPr id="224" name=""/>
           <p:cNvSpPr txBox="1"/>
           <p:nvPr/>
         </p:nvSpPr>
@@ -15516,7 +15473,7 @@
       </p:sp>
       <p:sp>
         <p:nvSpPr>
-          <p:cNvPr id="226" name=""/>
+          <p:cNvPr id="225" name=""/>
           <p:cNvSpPr txBox="1"/>
           <p:nvPr/>
         </p:nvSpPr>
@@ -15559,7 +15516,7 @@
       </p:sp>
       <p:sp>
         <p:nvSpPr>
-          <p:cNvPr id="227" name=""/>
+          <p:cNvPr id="226" name=""/>
           <p:cNvSpPr txBox="1"/>
           <p:nvPr/>
         </p:nvSpPr>
@@ -15602,7 +15559,7 @@
       </p:sp>
       <p:sp>
         <p:nvSpPr>
-          <p:cNvPr id="228" name=""/>
+          <p:cNvPr id="227" name=""/>
           <p:cNvSpPr txBox="1"/>
           <p:nvPr/>
         </p:nvSpPr>
@@ -15645,7 +15602,7 @@
       </p:sp>
       <p:sp>
         <p:nvSpPr>
-          <p:cNvPr id="229" name=""/>
+          <p:cNvPr id="228" name=""/>
           <p:cNvSpPr txBox="1"/>
           <p:nvPr/>
         </p:nvSpPr>
@@ -15688,7 +15645,7 @@
       </p:sp>
       <p:sp>
         <p:nvSpPr>
-          <p:cNvPr id="230" name=""/>
+          <p:cNvPr id="229" name=""/>
           <p:cNvSpPr txBox="1"/>
           <p:nvPr/>
         </p:nvSpPr>
@@ -15731,7 +15688,7 @@
       </p:sp>
       <p:sp>
         <p:nvSpPr>
-          <p:cNvPr id="231" name=""/>
+          <p:cNvPr id="230" name=""/>
           <p:cNvSpPr txBox="1"/>
           <p:nvPr/>
         </p:nvSpPr>
@@ -15774,7 +15731,7 @@
       </p:sp>
       <p:sp>
         <p:nvSpPr>
-          <p:cNvPr id="232" name=""/>
+          <p:cNvPr id="231" name=""/>
           <p:cNvSpPr txBox="1"/>
           <p:nvPr/>
         </p:nvSpPr>
@@ -15817,7 +15774,7 @@
       </p:sp>
       <p:sp>
         <p:nvSpPr>
-          <p:cNvPr id="233" name=""/>
+          <p:cNvPr id="232" name=""/>
           <p:cNvSpPr txBox="1"/>
           <p:nvPr/>
         </p:nvSpPr>
@@ -15860,7 +15817,7 @@
       </p:sp>
       <p:sp>
         <p:nvSpPr>
-          <p:cNvPr id="234" name=""/>
+          <p:cNvPr id="233" name=""/>
           <p:cNvSpPr txBox="1"/>
           <p:nvPr/>
         </p:nvSpPr>
@@ -15903,7 +15860,7 @@
       </p:sp>
       <p:sp>
         <p:nvSpPr>
-          <p:cNvPr id="235" name=""/>
+          <p:cNvPr id="234" name=""/>
           <p:cNvSpPr txBox="1"/>
           <p:nvPr/>
         </p:nvSpPr>
@@ -15946,7 +15903,7 @@
       </p:sp>
       <p:sp>
         <p:nvSpPr>
-          <p:cNvPr id="236" name=""/>
+          <p:cNvPr id="235" name=""/>
           <p:cNvSpPr txBox="1"/>
           <p:nvPr/>
         </p:nvSpPr>
@@ -15989,7 +15946,7 @@
       </p:sp>
       <p:sp>
         <p:nvSpPr>
-          <p:cNvPr id="237" name=""/>
+          <p:cNvPr id="236" name=""/>
           <p:cNvSpPr txBox="1"/>
           <p:nvPr/>
         </p:nvSpPr>
@@ -16032,7 +15989,7 @@
       </p:sp>
       <p:sp>
         <p:nvSpPr>
-          <p:cNvPr id="238" name=""/>
+          <p:cNvPr id="237" name=""/>
           <p:cNvSpPr txBox="1"/>
           <p:nvPr/>
         </p:nvSpPr>
@@ -16075,7 +16032,7 @@
       </p:sp>
       <p:sp>
         <p:nvSpPr>
-          <p:cNvPr id="239" name=""/>
+          <p:cNvPr id="238" name=""/>
           <p:cNvSpPr txBox="1"/>
           <p:nvPr/>
         </p:nvSpPr>
@@ -16118,7 +16075,7 @@
       </p:sp>
       <p:sp>
         <p:nvSpPr>
-          <p:cNvPr id="240" name=""/>
+          <p:cNvPr id="239" name=""/>
           <p:cNvSpPr txBox="1"/>
           <p:nvPr/>
         </p:nvSpPr>
@@ -16161,7 +16118,7 @@
       </p:sp>
       <p:sp>
         <p:nvSpPr>
-          <p:cNvPr id="241" name=""/>
+          <p:cNvPr id="240" name=""/>
           <p:cNvSpPr txBox="1"/>
           <p:nvPr/>
         </p:nvSpPr>
@@ -16204,7 +16161,7 @@
       </p:sp>
       <p:pic>
         <p:nvPicPr>
-          <p:cNvPr id="242" name="" descr=""/>
+          <p:cNvPr id="241" name="" descr=""/>
           <p:cNvPicPr/>
           <p:nvPr/>
         </p:nvPicPr>
@@ -16227,7 +16184,7 @@
       </p:pic>
       <p:sp>
         <p:nvSpPr>
-          <p:cNvPr id="243" name=""/>
+          <p:cNvPr id="242" name=""/>
           <p:cNvSpPr txBox="1"/>
           <p:nvPr/>
         </p:nvSpPr>
@@ -16270,7 +16227,7 @@
       </p:sp>
       <p:sp>
         <p:nvSpPr>
-          <p:cNvPr id="244" name=""/>
+          <p:cNvPr id="243" name=""/>
           <p:cNvSpPr txBox="1"/>
           <p:nvPr/>
         </p:nvSpPr>
@@ -16313,7 +16270,7 @@
       </p:sp>
       <p:sp>
         <p:nvSpPr>
-          <p:cNvPr id="245" name=""/>
+          <p:cNvPr id="244" name=""/>
           <p:cNvSpPr/>
           <p:nvPr/>
         </p:nvSpPr>
@@ -16371,7 +16328,7 @@
       </p:sp>
       <p:sp>
         <p:nvSpPr>
-          <p:cNvPr id="246" name=""/>
+          <p:cNvPr id="245" name=""/>
           <p:cNvSpPr txBox="1"/>
           <p:nvPr/>
         </p:nvSpPr>
@@ -16444,7 +16401,7 @@
       </p:grpSpPr>
       <p:sp>
         <p:nvSpPr>
-          <p:cNvPr id="247" name=""/>
+          <p:cNvPr id="246" name=""/>
           <p:cNvSpPr/>
           <p:nvPr/>
         </p:nvSpPr>
@@ -16502,7 +16459,7 @@
       </p:sp>
       <p:sp>
         <p:nvSpPr>
-          <p:cNvPr id="248" name=""/>
+          <p:cNvPr id="247" name=""/>
           <p:cNvSpPr/>
           <p:nvPr/>
         </p:nvSpPr>
@@ -16560,7 +16517,7 @@
       </p:sp>
       <p:sp>
         <p:nvSpPr>
-          <p:cNvPr id="249" name=""/>
+          <p:cNvPr id="248" name=""/>
           <p:cNvSpPr/>
           <p:nvPr/>
         </p:nvSpPr>
@@ -16618,7 +16575,7 @@
       </p:sp>
       <p:sp>
         <p:nvSpPr>
-          <p:cNvPr id="250" name=""/>
+          <p:cNvPr id="249" name=""/>
           <p:cNvSpPr/>
           <p:nvPr/>
         </p:nvSpPr>
@@ -16676,7 +16633,7 @@
       </p:sp>
       <p:sp>
         <p:nvSpPr>
-          <p:cNvPr id="251" name=""/>
+          <p:cNvPr id="250" name=""/>
           <p:cNvSpPr/>
           <p:nvPr/>
         </p:nvSpPr>
@@ -16734,7 +16691,7 @@
       </p:sp>
       <p:sp>
         <p:nvSpPr>
-          <p:cNvPr id="252" name=""/>
+          <p:cNvPr id="251" name=""/>
           <p:cNvSpPr/>
           <p:nvPr/>
         </p:nvSpPr>
@@ -16792,7 +16749,7 @@
       </p:sp>
       <p:pic>
         <p:nvPicPr>
-          <p:cNvPr id="253" name="" descr=""/>
+          <p:cNvPr id="252" name="" descr=""/>
           <p:cNvPicPr/>
           <p:nvPr/>
         </p:nvPicPr>
@@ -16815,7 +16772,7 @@
       </p:pic>
       <p:sp>
         <p:nvSpPr>
-          <p:cNvPr id="254" name=""/>
+          <p:cNvPr id="253" name=""/>
           <p:cNvSpPr txBox="1"/>
           <p:nvPr/>
         </p:nvSpPr>
@@ -16858,7 +16815,7 @@
       </p:sp>
       <p:pic>
         <p:nvPicPr>
-          <p:cNvPr id="255" name="" descr=""/>
+          <p:cNvPr id="254" name="" descr=""/>
           <p:cNvPicPr/>
           <p:nvPr/>
         </p:nvPicPr>
@@ -16881,7 +16838,7 @@
       </p:pic>
       <p:sp>
         <p:nvSpPr>
-          <p:cNvPr id="256" name=""/>
+          <p:cNvPr id="255" name=""/>
           <p:cNvSpPr txBox="1"/>
           <p:nvPr/>
         </p:nvSpPr>
@@ -16924,7 +16881,7 @@
       </p:sp>
       <p:sp>
         <p:nvSpPr>
-          <p:cNvPr id="257" name=""/>
+          <p:cNvPr id="256" name=""/>
           <p:cNvSpPr txBox="1"/>
           <p:nvPr/>
         </p:nvSpPr>
@@ -16967,7 +16924,7 @@
       </p:sp>
       <p:sp>
         <p:nvSpPr>
-          <p:cNvPr id="258" name=""/>
+          <p:cNvPr id="257" name=""/>
           <p:cNvSpPr/>
           <p:nvPr/>
         </p:nvSpPr>
@@ -17025,7 +16982,7 @@
       </p:sp>
       <p:sp>
         <p:nvSpPr>
-          <p:cNvPr id="259" name=""/>
+          <p:cNvPr id="258" name=""/>
           <p:cNvSpPr/>
           <p:nvPr/>
         </p:nvSpPr>
@@ -17083,7 +17040,7 @@
       </p:sp>
       <p:sp>
         <p:nvSpPr>
-          <p:cNvPr id="260" name=""/>
+          <p:cNvPr id="259" name=""/>
           <p:cNvSpPr/>
           <p:nvPr/>
         </p:nvSpPr>
@@ -17141,7 +17098,7 @@
       </p:sp>
       <p:sp>
         <p:nvSpPr>
-          <p:cNvPr id="261" name=""/>
+          <p:cNvPr id="260" name=""/>
           <p:cNvSpPr/>
           <p:nvPr/>
         </p:nvSpPr>
@@ -17199,7 +17156,7 @@
       </p:sp>
       <p:sp>
         <p:nvSpPr>
-          <p:cNvPr id="262" name=""/>
+          <p:cNvPr id="261" name=""/>
           <p:cNvSpPr/>
           <p:nvPr/>
         </p:nvSpPr>
@@ -17257,7 +17214,7 @@
       </p:sp>
       <p:sp>
         <p:nvSpPr>
-          <p:cNvPr id="263" name=""/>
+          <p:cNvPr id="262" name=""/>
           <p:cNvSpPr/>
           <p:nvPr/>
         </p:nvSpPr>
@@ -17315,7 +17272,7 @@
       </p:sp>
       <p:sp>
         <p:nvSpPr>
-          <p:cNvPr id="264" name=""/>
+          <p:cNvPr id="263" name=""/>
           <p:cNvSpPr txBox="1"/>
           <p:nvPr/>
         </p:nvSpPr>
@@ -17358,7 +17315,7 @@
       </p:sp>
       <p:sp>
         <p:nvSpPr>
-          <p:cNvPr id="265" name=""/>
+          <p:cNvPr id="264" name=""/>
           <p:cNvSpPr txBox="1"/>
           <p:nvPr/>
         </p:nvSpPr>
@@ -17411,7 +17368,7 @@
       </p:sp>
       <p:sp>
         <p:nvSpPr>
-          <p:cNvPr id="266" name=""/>
+          <p:cNvPr id="265" name=""/>
           <p:cNvSpPr txBox="1"/>
           <p:nvPr/>
         </p:nvSpPr>
@@ -17454,7 +17411,7 @@
       </p:sp>
       <p:sp>
         <p:nvSpPr>
-          <p:cNvPr id="267" name=""/>
+          <p:cNvPr id="266" name=""/>
           <p:cNvSpPr/>
           <p:nvPr/>
         </p:nvSpPr>
@@ -17512,7 +17469,7 @@
       </p:sp>
       <p:sp>
         <p:nvSpPr>
-          <p:cNvPr id="268" name=""/>
+          <p:cNvPr id="267" name=""/>
           <p:cNvSpPr txBox="1"/>
           <p:nvPr/>
         </p:nvSpPr>
@@ -17555,7 +17512,7 @@
       </p:sp>
       <p:sp>
         <p:nvSpPr>
-          <p:cNvPr id="269" name=""/>
+          <p:cNvPr id="268" name=""/>
           <p:cNvSpPr txBox="1"/>
           <p:nvPr/>
         </p:nvSpPr>
@@ -17608,7 +17565,7 @@
       </p:sp>
       <p:sp>
         <p:nvSpPr>
-          <p:cNvPr id="270" name=""/>
+          <p:cNvPr id="269" name=""/>
           <p:cNvSpPr txBox="1"/>
           <p:nvPr/>
         </p:nvSpPr>
@@ -17651,7 +17608,7 @@
       </p:sp>
       <p:sp>
         <p:nvSpPr>
-          <p:cNvPr id="271" name=""/>
+          <p:cNvPr id="270" name=""/>
           <p:cNvSpPr txBox="1"/>
           <p:nvPr/>
         </p:nvSpPr>
@@ -17694,7 +17651,7 @@
       </p:sp>
       <p:sp>
         <p:nvSpPr>
-          <p:cNvPr id="272" name=""/>
+          <p:cNvPr id="271" name=""/>
           <p:cNvSpPr/>
           <p:nvPr/>
         </p:nvSpPr>
@@ -17752,7 +17709,7 @@
       </p:sp>
       <p:sp>
         <p:nvSpPr>
-          <p:cNvPr id="273" name=""/>
+          <p:cNvPr id="272" name=""/>
           <p:cNvSpPr txBox="1"/>
           <p:nvPr/>
         </p:nvSpPr>
@@ -17795,7 +17752,7 @@
       </p:sp>
       <p:sp>
         <p:nvSpPr>
-          <p:cNvPr id="274" name=""/>
+          <p:cNvPr id="273" name=""/>
           <p:cNvSpPr txBox="1"/>
           <p:nvPr/>
         </p:nvSpPr>
@@ -17848,7 +17805,7 @@
       </p:sp>
       <p:sp>
         <p:nvSpPr>
-          <p:cNvPr id="275" name=""/>
+          <p:cNvPr id="274" name=""/>
           <p:cNvSpPr/>
           <p:nvPr/>
         </p:nvSpPr>
@@ -17906,7 +17863,7 @@
       </p:sp>
       <p:sp>
         <p:nvSpPr>
-          <p:cNvPr id="276" name=""/>
+          <p:cNvPr id="275" name=""/>
           <p:cNvSpPr txBox="1"/>
           <p:nvPr/>
         </p:nvSpPr>
@@ -17949,14 +17906,14 @@
       </p:sp>
       <p:sp>
         <p:nvSpPr>
-          <p:cNvPr id="277" name=""/>
+          <p:cNvPr id="276" name=""/>
           <p:cNvSpPr txBox="1"/>
           <p:nvPr/>
         </p:nvSpPr>
         <p:spPr>
           <a:xfrm>
             <a:off x="5554080" y="3565440"/>
-            <a:ext cx="3704040" cy="163440"/>
+            <a:ext cx="3525840" cy="163440"/>
           </a:xfrm>
           <a:prstGeom prst="rect">
             <a:avLst/>
@@ -17979,7 +17936,7 @@
                 <a:latin typeface="Arial"/>
                 <a:ea typeface="Arial"/>
               </a:rPr>
-              <a:t>Gecontroleerd tegen de plaat; wat de plaat niet kent</a:t>
+              <a:t>Gecontroleerd tegen de plaat; wat buiten de plaat</a:t>
             </a:r>
             <a:endParaRPr b="0" lang="en-US" sz="1110" spc="-1" strike="noStrike">
               <a:solidFill>
@@ -17992,14 +17949,14 @@
       </p:sp>
       <p:sp>
         <p:nvSpPr>
-          <p:cNvPr id="278" name=""/>
+          <p:cNvPr id="277" name=""/>
           <p:cNvSpPr txBox="1"/>
           <p:nvPr/>
         </p:nvSpPr>
         <p:spPr>
           <a:xfrm>
             <a:off x="5554080" y="3822840"/>
-            <a:ext cx="1151280" cy="163440"/>
+            <a:ext cx="2745360" cy="163440"/>
           </a:xfrm>
           <a:prstGeom prst="rect">
             <a:avLst/>
@@ -18022,7 +17979,7 @@
                 <a:latin typeface="Arial"/>
                 <a:ea typeface="Arial"/>
               </a:rPr>
-              <a:t>wordt een vraag</a:t>
+              <a:t>valt wordt een vraag aan de kerngroep</a:t>
             </a:r>
             <a:endParaRPr b="0" lang="en-US" sz="1110" spc="-1" strike="noStrike">
               <a:solidFill>
@@ -18035,7 +17992,7 @@
       </p:sp>
       <p:sp>
         <p:nvSpPr>
-          <p:cNvPr id="279" name=""/>
+          <p:cNvPr id="278" name=""/>
           <p:cNvSpPr txBox="1"/>
           <p:nvPr/>
         </p:nvSpPr>
@@ -18078,7 +18035,7 @@
       </p:sp>
       <p:sp>
         <p:nvSpPr>
-          <p:cNvPr id="280" name=""/>
+          <p:cNvPr id="279" name=""/>
           <p:cNvSpPr/>
           <p:nvPr/>
         </p:nvSpPr>
@@ -18136,7 +18093,7 @@
       </p:sp>
       <p:sp>
         <p:nvSpPr>
-          <p:cNvPr id="281" name=""/>
+          <p:cNvPr id="280" name=""/>
           <p:cNvSpPr txBox="1"/>
           <p:nvPr/>
         </p:nvSpPr>
@@ -18209,7 +18166,7 @@
       </p:grpSpPr>
       <p:sp>
         <p:nvSpPr>
-          <p:cNvPr id="282" name=""/>
+          <p:cNvPr id="281" name=""/>
           <p:cNvSpPr/>
           <p:nvPr/>
         </p:nvSpPr>
@@ -18267,7 +18224,7 @@
       </p:sp>
       <p:sp>
         <p:nvSpPr>
-          <p:cNvPr id="283" name=""/>
+          <p:cNvPr id="282" name=""/>
           <p:cNvSpPr/>
           <p:nvPr/>
         </p:nvSpPr>
@@ -18325,7 +18282,7 @@
       </p:sp>
       <p:sp>
         <p:nvSpPr>
-          <p:cNvPr id="284" name=""/>
+          <p:cNvPr id="283" name=""/>
           <p:cNvSpPr/>
           <p:nvPr/>
         </p:nvSpPr>
@@ -18383,7 +18340,7 @@
       </p:sp>
       <p:sp>
         <p:nvSpPr>
-          <p:cNvPr id="285" name=""/>
+          <p:cNvPr id="284" name=""/>
           <p:cNvSpPr/>
           <p:nvPr/>
         </p:nvSpPr>
@@ -18441,7 +18398,7 @@
       </p:sp>
       <p:sp>
         <p:nvSpPr>
-          <p:cNvPr id="286" name=""/>
+          <p:cNvPr id="285" name=""/>
           <p:cNvSpPr/>
           <p:nvPr/>
         </p:nvSpPr>
@@ -18499,7 +18456,7 @@
       </p:sp>
       <p:sp>
         <p:nvSpPr>
-          <p:cNvPr id="287" name=""/>
+          <p:cNvPr id="286" name=""/>
           <p:cNvSpPr/>
           <p:nvPr/>
         </p:nvSpPr>
@@ -18557,7 +18514,7 @@
       </p:sp>
       <p:pic>
         <p:nvPicPr>
-          <p:cNvPr id="288" name="" descr=""/>
+          <p:cNvPr id="287" name="" descr=""/>
           <p:cNvPicPr/>
           <p:nvPr/>
         </p:nvPicPr>
@@ -18580,57 +18537,14 @@
       </p:pic>
       <p:sp>
         <p:nvSpPr>
-          <p:cNvPr id="289" name=""/>
-          <p:cNvSpPr txBox="1"/>
-          <p:nvPr/>
-        </p:nvSpPr>
-        <p:spPr>
-          <a:xfrm>
-            <a:off x="439920" y="5760"/>
-            <a:ext cx="9410040" cy="399600"/>
-          </a:xfrm>
-          <a:prstGeom prst="rect">
-            <a:avLst/>
-          </a:prstGeom>
-          <a:noFill/>
-          <a:ln w="0">
-            <a:noFill/>
-          </a:ln>
-        </p:spPr>
-        <p:txBody>
-          <a:bodyPr lIns="0" rIns="0" tIns="0" bIns="0" anchor="t">
-            <a:noAutofit/>
-          </a:bodyPr>
-          <a:p>
-            <a:r>
-              <a:rPr b="1" lang="en-US" sz="2700" spc="-1" strike="noStrike">
-                <a:solidFill>
-                  <a:srgbClr val="dd784b"/>
-                </a:solidFill>
-                <a:latin typeface="Arial"/>
-                <a:ea typeface="Arial"/>
-              </a:rPr>
-              <a:t>Waar OKx andere ontwikkelingen raakt, en waar</a:t>
-            </a:r>
-            <a:endParaRPr b="0" lang="en-US" sz="2700" spc="-1" strike="noStrike">
-              <a:solidFill>
-                <a:srgbClr val="000000"/>
-              </a:solidFill>
-              <a:latin typeface="DejaVu Serif"/>
-            </a:endParaRPr>
-          </a:p>
-        </p:txBody>
-      </p:sp>
-      <p:sp>
-        <p:nvSpPr>
-          <p:cNvPr id="290" name=""/>
+          <p:cNvPr id="288" name=""/>
           <p:cNvSpPr/>
           <p:nvPr/>
         </p:nvSpPr>
         <p:spPr>
           <a:xfrm>
-            <a:off x="456840" y="981000"/>
-            <a:ext cx="2210400" cy="304920"/>
+            <a:off x="456840" y="704520"/>
+            <a:ext cx="2200680" cy="305280"/>
           </a:xfrm>
           <a:custGeom>
             <a:avLst/>
@@ -18638,18 +18552,18 @@
             <a:ahLst/>
             <a:rect l="0" t="0" r="r" b="b"/>
             <a:pathLst>
-              <a:path w="6140" h="847">
+              <a:path w="6113" h="848">
                 <a:moveTo>
                   <a:pt x="0" y="0"/>
                 </a:moveTo>
                 <a:lnTo>
-                  <a:pt x="6140" y="0"/>
-                </a:lnTo>
-                <a:lnTo>
-                  <a:pt x="6140" y="847"/>
-                </a:lnTo>
-                <a:lnTo>
-                  <a:pt x="0" y="847"/>
+                  <a:pt x="6113" y="0"/>
+                </a:lnTo>
+                <a:lnTo>
+                  <a:pt x="6113" y="848"/>
+                </a:lnTo>
+                <a:lnTo>
+                  <a:pt x="0" y="848"/>
                 </a:lnTo>
                 <a:lnTo>
                   <a:pt x="0" y="0"/>
@@ -18681,14 +18595,14 @@
       </p:sp>
       <p:sp>
         <p:nvSpPr>
-          <p:cNvPr id="291" name=""/>
+          <p:cNvPr id="289" name=""/>
           <p:cNvSpPr/>
           <p:nvPr/>
         </p:nvSpPr>
         <p:spPr>
           <a:xfrm>
-            <a:off x="2666880" y="981000"/>
-            <a:ext cx="3162600" cy="304920"/>
+            <a:off x="2657160" y="704520"/>
+            <a:ext cx="3124800" cy="305280"/>
           </a:xfrm>
           <a:custGeom>
             <a:avLst/>
@@ -18696,18 +18610,18 @@
             <a:ahLst/>
             <a:rect l="0" t="0" r="r" b="b"/>
             <a:pathLst>
-              <a:path w="8785" h="847">
+              <a:path w="8680" h="848">
                 <a:moveTo>
                   <a:pt x="0" y="0"/>
                 </a:moveTo>
                 <a:lnTo>
-                  <a:pt x="8785" y="0"/>
-                </a:lnTo>
-                <a:lnTo>
-                  <a:pt x="8785" y="847"/>
-                </a:lnTo>
-                <a:lnTo>
-                  <a:pt x="0" y="847"/>
+                  <a:pt x="8680" y="0"/>
+                </a:lnTo>
+                <a:lnTo>
+                  <a:pt x="8680" y="848"/>
+                </a:lnTo>
+                <a:lnTo>
+                  <a:pt x="0" y="848"/>
                 </a:lnTo>
                 <a:lnTo>
                   <a:pt x="0" y="0"/>
@@ -18739,14 +18653,14 @@
       </p:sp>
       <p:sp>
         <p:nvSpPr>
-          <p:cNvPr id="292" name=""/>
+          <p:cNvPr id="290" name=""/>
           <p:cNvSpPr/>
           <p:nvPr/>
         </p:nvSpPr>
         <p:spPr>
           <a:xfrm>
-            <a:off x="5829120" y="981000"/>
-            <a:ext cx="3048480" cy="304920"/>
+            <a:off x="5781600" y="704520"/>
+            <a:ext cx="3096000" cy="305280"/>
           </a:xfrm>
           <a:custGeom>
             <a:avLst/>
@@ -18754,18 +18668,18 @@
             <a:ahLst/>
             <a:rect l="0" t="0" r="r" b="b"/>
             <a:pathLst>
-              <a:path w="8468" h="847">
+              <a:path w="8600" h="848">
                 <a:moveTo>
                   <a:pt x="0" y="0"/>
                 </a:moveTo>
                 <a:lnTo>
-                  <a:pt x="8468" y="0"/>
-                </a:lnTo>
-                <a:lnTo>
-                  <a:pt x="8468" y="847"/>
-                </a:lnTo>
-                <a:lnTo>
-                  <a:pt x="0" y="847"/>
+                  <a:pt x="8600" y="0"/>
+                </a:lnTo>
+                <a:lnTo>
+                  <a:pt x="8600" y="848"/>
+                </a:lnTo>
+                <a:lnTo>
+                  <a:pt x="0" y="848"/>
                 </a:lnTo>
                 <a:lnTo>
                   <a:pt x="0" y="0"/>
@@ -18797,14 +18711,14 @@
       </p:sp>
       <p:sp>
         <p:nvSpPr>
-          <p:cNvPr id="293" name=""/>
+          <p:cNvPr id="291" name=""/>
           <p:cNvSpPr/>
           <p:nvPr/>
         </p:nvSpPr>
         <p:spPr>
           <a:xfrm>
-            <a:off x="456840" y="1276200"/>
-            <a:ext cx="2210400" cy="19440"/>
+            <a:off x="456840" y="1000080"/>
+            <a:ext cx="2200680" cy="19440"/>
           </a:xfrm>
           <a:custGeom>
             <a:avLst/>
@@ -18812,15 +18726,15 @@
             <a:ahLst/>
             <a:rect l="0" t="0" r="r" b="b"/>
             <a:pathLst>
-              <a:path w="6140" h="54">
+              <a:path w="6113" h="54">
                 <a:moveTo>
                   <a:pt x="0" y="0"/>
                 </a:moveTo>
                 <a:lnTo>
-                  <a:pt x="6140" y="0"/>
-                </a:lnTo>
-                <a:lnTo>
-                  <a:pt x="6140" y="54"/>
+                  <a:pt x="6113" y="0"/>
+                </a:lnTo>
+                <a:lnTo>
+                  <a:pt x="6113" y="54"/>
                 </a:lnTo>
                 <a:lnTo>
                   <a:pt x="0" y="54"/>
@@ -18855,14 +18769,14 @@
       </p:sp>
       <p:sp>
         <p:nvSpPr>
-          <p:cNvPr id="294" name=""/>
+          <p:cNvPr id="292" name=""/>
           <p:cNvSpPr/>
           <p:nvPr/>
         </p:nvSpPr>
         <p:spPr>
           <a:xfrm>
-            <a:off x="2666880" y="1276200"/>
-            <a:ext cx="3162600" cy="19440"/>
+            <a:off x="2657160" y="1000080"/>
+            <a:ext cx="3124800" cy="19440"/>
           </a:xfrm>
           <a:custGeom>
             <a:avLst/>
@@ -18870,15 +18784,15 @@
             <a:ahLst/>
             <a:rect l="0" t="0" r="r" b="b"/>
             <a:pathLst>
-              <a:path w="8785" h="54">
+              <a:path w="8680" h="54">
                 <a:moveTo>
                   <a:pt x="0" y="0"/>
                 </a:moveTo>
                 <a:lnTo>
-                  <a:pt x="8785" y="0"/>
-                </a:lnTo>
-                <a:lnTo>
-                  <a:pt x="8785" y="54"/>
+                  <a:pt x="8680" y="0"/>
+                </a:lnTo>
+                <a:lnTo>
+                  <a:pt x="8680" y="54"/>
                 </a:lnTo>
                 <a:lnTo>
                   <a:pt x="0" y="54"/>
@@ -18913,14 +18827,14 @@
       </p:sp>
       <p:sp>
         <p:nvSpPr>
-          <p:cNvPr id="295" name=""/>
+          <p:cNvPr id="293" name=""/>
           <p:cNvSpPr/>
           <p:nvPr/>
         </p:nvSpPr>
         <p:spPr>
           <a:xfrm>
-            <a:off x="5829120" y="1276200"/>
-            <a:ext cx="3048480" cy="19440"/>
+            <a:off x="5781600" y="1000080"/>
+            <a:ext cx="3096000" cy="19440"/>
           </a:xfrm>
           <a:custGeom>
             <a:avLst/>
@@ -18928,15 +18842,15 @@
             <a:ahLst/>
             <a:rect l="0" t="0" r="r" b="b"/>
             <a:pathLst>
-              <a:path w="8468" h="54">
+              <a:path w="8600" h="54">
                 <a:moveTo>
                   <a:pt x="0" y="0"/>
                 </a:moveTo>
                 <a:lnTo>
-                  <a:pt x="8468" y="0"/>
-                </a:lnTo>
-                <a:lnTo>
-                  <a:pt x="8468" y="54"/>
+                  <a:pt x="8600" y="0"/>
+                </a:lnTo>
+                <a:lnTo>
+                  <a:pt x="8600" y="54"/>
                 </a:lnTo>
                 <a:lnTo>
                   <a:pt x="0" y="54"/>
@@ -18971,14 +18885,14 @@
       </p:sp>
       <p:sp>
         <p:nvSpPr>
-          <p:cNvPr id="296" name=""/>
+          <p:cNvPr id="294" name=""/>
           <p:cNvSpPr/>
           <p:nvPr/>
         </p:nvSpPr>
         <p:spPr>
           <a:xfrm>
-            <a:off x="456840" y="1981080"/>
-            <a:ext cx="2210400" cy="9720"/>
+            <a:off x="456840" y="1704960"/>
+            <a:ext cx="2200680" cy="9720"/>
           </a:xfrm>
           <a:custGeom>
             <a:avLst/>
@@ -18986,15 +18900,15 @@
             <a:ahLst/>
             <a:rect l="0" t="0" r="r" b="b"/>
             <a:pathLst>
-              <a:path w="6140" h="27">
+              <a:path w="6113" h="27">
                 <a:moveTo>
                   <a:pt x="0" y="0"/>
                 </a:moveTo>
                 <a:lnTo>
-                  <a:pt x="6140" y="0"/>
-                </a:lnTo>
-                <a:lnTo>
-                  <a:pt x="6140" y="27"/>
+                  <a:pt x="6113" y="0"/>
+                </a:lnTo>
+                <a:lnTo>
+                  <a:pt x="6113" y="27"/>
                 </a:lnTo>
                 <a:lnTo>
                   <a:pt x="0" y="27"/>
@@ -19031,14 +18945,14 @@
       </p:sp>
       <p:sp>
         <p:nvSpPr>
-          <p:cNvPr id="297" name=""/>
+          <p:cNvPr id="295" name=""/>
           <p:cNvSpPr/>
           <p:nvPr/>
         </p:nvSpPr>
         <p:spPr>
           <a:xfrm>
-            <a:off x="2666880" y="1981080"/>
-            <a:ext cx="3162600" cy="9720"/>
+            <a:off x="2657160" y="1704960"/>
+            <a:ext cx="3124800" cy="9720"/>
           </a:xfrm>
           <a:custGeom>
             <a:avLst/>
@@ -19046,15 +18960,15 @@
             <a:ahLst/>
             <a:rect l="0" t="0" r="r" b="b"/>
             <a:pathLst>
-              <a:path w="8785" h="27">
+              <a:path w="8680" h="27">
                 <a:moveTo>
                   <a:pt x="0" y="0"/>
                 </a:moveTo>
                 <a:lnTo>
-                  <a:pt x="8785" y="0"/>
-                </a:lnTo>
-                <a:lnTo>
-                  <a:pt x="8785" y="27"/>
+                  <a:pt x="8680" y="0"/>
+                </a:lnTo>
+                <a:lnTo>
+                  <a:pt x="8680" y="27"/>
                 </a:lnTo>
                 <a:lnTo>
                   <a:pt x="0" y="27"/>
@@ -19091,14 +19005,14 @@
       </p:sp>
       <p:sp>
         <p:nvSpPr>
-          <p:cNvPr id="298" name=""/>
+          <p:cNvPr id="296" name=""/>
           <p:cNvSpPr/>
           <p:nvPr/>
         </p:nvSpPr>
         <p:spPr>
           <a:xfrm>
-            <a:off x="5829120" y="1981080"/>
-            <a:ext cx="3048480" cy="9720"/>
+            <a:off x="5781600" y="1704960"/>
+            <a:ext cx="3096000" cy="9720"/>
           </a:xfrm>
           <a:custGeom>
             <a:avLst/>
@@ -19106,15 +19020,15 @@
             <a:ahLst/>
             <a:rect l="0" t="0" r="r" b="b"/>
             <a:pathLst>
-              <a:path w="8468" h="27">
+              <a:path w="8600" h="27">
                 <a:moveTo>
                   <a:pt x="0" y="0"/>
                 </a:moveTo>
                 <a:lnTo>
-                  <a:pt x="8468" y="0"/>
-                </a:lnTo>
-                <a:lnTo>
-                  <a:pt x="8468" y="27"/>
+                  <a:pt x="8600" y="0"/>
+                </a:lnTo>
+                <a:lnTo>
+                  <a:pt x="8600" y="27"/>
                 </a:lnTo>
                 <a:lnTo>
                   <a:pt x="0" y="27"/>
@@ -19151,14 +19065,14 @@
       </p:sp>
       <p:sp>
         <p:nvSpPr>
-          <p:cNvPr id="299" name=""/>
+          <p:cNvPr id="297" name=""/>
           <p:cNvSpPr/>
           <p:nvPr/>
         </p:nvSpPr>
         <p:spPr>
           <a:xfrm>
-            <a:off x="456840" y="2676240"/>
-            <a:ext cx="2210400" cy="10080"/>
+            <a:off x="456840" y="2400120"/>
+            <a:ext cx="2200680" cy="9720"/>
           </a:xfrm>
           <a:custGeom>
             <a:avLst/>
@@ -19166,18 +19080,18 @@
             <a:ahLst/>
             <a:rect l="0" t="0" r="r" b="b"/>
             <a:pathLst>
-              <a:path w="6140" h="28">
+              <a:path w="6113" h="27">
                 <a:moveTo>
                   <a:pt x="0" y="0"/>
                 </a:moveTo>
                 <a:lnTo>
-                  <a:pt x="6140" y="0"/>
-                </a:lnTo>
-                <a:lnTo>
-                  <a:pt x="6140" y="28"/>
-                </a:lnTo>
-                <a:lnTo>
-                  <a:pt x="0" y="28"/>
+                  <a:pt x="6113" y="0"/>
+                </a:lnTo>
+                <a:lnTo>
+                  <a:pt x="6113" y="27"/>
+                </a:lnTo>
+                <a:lnTo>
+                  <a:pt x="0" y="27"/>
                 </a:lnTo>
                 <a:lnTo>
                   <a:pt x="0" y="0"/>
@@ -19211,14 +19125,14 @@
       </p:sp>
       <p:sp>
         <p:nvSpPr>
-          <p:cNvPr id="300" name=""/>
+          <p:cNvPr id="298" name=""/>
           <p:cNvSpPr/>
           <p:nvPr/>
         </p:nvSpPr>
         <p:spPr>
           <a:xfrm>
-            <a:off x="2666880" y="2676240"/>
-            <a:ext cx="3162600" cy="10080"/>
+            <a:off x="2657160" y="2400120"/>
+            <a:ext cx="3124800" cy="9720"/>
           </a:xfrm>
           <a:custGeom>
             <a:avLst/>
@@ -19226,18 +19140,18 @@
             <a:ahLst/>
             <a:rect l="0" t="0" r="r" b="b"/>
             <a:pathLst>
-              <a:path w="8785" h="28">
+              <a:path w="8680" h="27">
                 <a:moveTo>
                   <a:pt x="0" y="0"/>
                 </a:moveTo>
                 <a:lnTo>
-                  <a:pt x="8785" y="0"/>
-                </a:lnTo>
-                <a:lnTo>
-                  <a:pt x="8785" y="28"/>
-                </a:lnTo>
-                <a:lnTo>
-                  <a:pt x="0" y="28"/>
+                  <a:pt x="8680" y="0"/>
+                </a:lnTo>
+                <a:lnTo>
+                  <a:pt x="8680" y="27"/>
+                </a:lnTo>
+                <a:lnTo>
+                  <a:pt x="0" y="27"/>
                 </a:lnTo>
                 <a:lnTo>
                   <a:pt x="0" y="0"/>
@@ -19271,14 +19185,14 @@
       </p:sp>
       <p:sp>
         <p:nvSpPr>
-          <p:cNvPr id="301" name=""/>
+          <p:cNvPr id="299" name=""/>
           <p:cNvSpPr/>
           <p:nvPr/>
         </p:nvSpPr>
         <p:spPr>
           <a:xfrm>
-            <a:off x="5829120" y="2676240"/>
-            <a:ext cx="3048480" cy="10080"/>
+            <a:off x="5781600" y="2400120"/>
+            <a:ext cx="3096000" cy="9720"/>
           </a:xfrm>
           <a:custGeom>
             <a:avLst/>
@@ -19286,18 +19200,18 @@
             <a:ahLst/>
             <a:rect l="0" t="0" r="r" b="b"/>
             <a:pathLst>
-              <a:path w="8468" h="28">
+              <a:path w="8600" h="27">
                 <a:moveTo>
                   <a:pt x="0" y="0"/>
                 </a:moveTo>
                 <a:lnTo>
-                  <a:pt x="8468" y="0"/>
-                </a:lnTo>
-                <a:lnTo>
-                  <a:pt x="8468" y="28"/>
-                </a:lnTo>
-                <a:lnTo>
-                  <a:pt x="0" y="28"/>
+                  <a:pt x="8600" y="0"/>
+                </a:lnTo>
+                <a:lnTo>
+                  <a:pt x="8600" y="27"/>
+                </a:lnTo>
+                <a:lnTo>
+                  <a:pt x="0" y="27"/>
                 </a:lnTo>
                 <a:lnTo>
                   <a:pt x="0" y="0"/>
@@ -19331,14 +19245,14 @@
       </p:sp>
       <p:sp>
         <p:nvSpPr>
-          <p:cNvPr id="302" name=""/>
+          <p:cNvPr id="300" name=""/>
           <p:cNvSpPr/>
           <p:nvPr/>
         </p:nvSpPr>
         <p:spPr>
           <a:xfrm>
-            <a:off x="456840" y="3371760"/>
-            <a:ext cx="2210400" cy="9720"/>
+            <a:off x="456840" y="3085920"/>
+            <a:ext cx="2200680" cy="9720"/>
           </a:xfrm>
           <a:custGeom>
             <a:avLst/>
@@ -19346,15 +19260,15 @@
             <a:ahLst/>
             <a:rect l="0" t="0" r="r" b="b"/>
             <a:pathLst>
-              <a:path w="6140" h="27">
+              <a:path w="6113" h="27">
                 <a:moveTo>
                   <a:pt x="0" y="0"/>
                 </a:moveTo>
                 <a:lnTo>
-                  <a:pt x="6140" y="0"/>
-                </a:lnTo>
-                <a:lnTo>
-                  <a:pt x="6140" y="27"/>
+                  <a:pt x="6113" y="0"/>
+                </a:lnTo>
+                <a:lnTo>
+                  <a:pt x="6113" y="27"/>
                 </a:lnTo>
                 <a:lnTo>
                   <a:pt x="0" y="27"/>
@@ -19391,14 +19305,14 @@
       </p:sp>
       <p:sp>
         <p:nvSpPr>
-          <p:cNvPr id="303" name=""/>
+          <p:cNvPr id="301" name=""/>
           <p:cNvSpPr/>
           <p:nvPr/>
         </p:nvSpPr>
         <p:spPr>
           <a:xfrm>
-            <a:off x="2666880" y="3371760"/>
-            <a:ext cx="3162600" cy="9720"/>
+            <a:off x="2657160" y="3085920"/>
+            <a:ext cx="3124800" cy="9720"/>
           </a:xfrm>
           <a:custGeom>
             <a:avLst/>
@@ -19406,15 +19320,15 @@
             <a:ahLst/>
             <a:rect l="0" t="0" r="r" b="b"/>
             <a:pathLst>
-              <a:path w="8785" h="27">
+              <a:path w="8680" h="27">
                 <a:moveTo>
                   <a:pt x="0" y="0"/>
                 </a:moveTo>
                 <a:lnTo>
-                  <a:pt x="8785" y="0"/>
-                </a:lnTo>
-                <a:lnTo>
-                  <a:pt x="8785" y="27"/>
+                  <a:pt x="8680" y="0"/>
+                </a:lnTo>
+                <a:lnTo>
+                  <a:pt x="8680" y="27"/>
                 </a:lnTo>
                 <a:lnTo>
                   <a:pt x="0" y="27"/>
@@ -19451,14 +19365,14 @@
       </p:sp>
       <p:sp>
         <p:nvSpPr>
-          <p:cNvPr id="304" name=""/>
+          <p:cNvPr id="302" name=""/>
           <p:cNvSpPr/>
           <p:nvPr/>
         </p:nvSpPr>
         <p:spPr>
           <a:xfrm>
-            <a:off x="5829120" y="3371760"/>
-            <a:ext cx="3048480" cy="9720"/>
+            <a:off x="5781600" y="3085920"/>
+            <a:ext cx="3096000" cy="9720"/>
           </a:xfrm>
           <a:custGeom>
             <a:avLst/>
@@ -19466,15 +19380,15 @@
             <a:ahLst/>
             <a:rect l="0" t="0" r="r" b="b"/>
             <a:pathLst>
-              <a:path w="8468" h="27">
+              <a:path w="8600" h="27">
                 <a:moveTo>
                   <a:pt x="0" y="0"/>
                 </a:moveTo>
                 <a:lnTo>
-                  <a:pt x="8468" y="0"/>
-                </a:lnTo>
-                <a:lnTo>
-                  <a:pt x="8468" y="27"/>
+                  <a:pt x="8600" y="0"/>
+                </a:lnTo>
+                <a:lnTo>
+                  <a:pt x="8600" y="27"/>
                 </a:lnTo>
                 <a:lnTo>
                   <a:pt x="0" y="27"/>
@@ -19511,14 +19425,14 @@
       </p:sp>
       <p:sp>
         <p:nvSpPr>
-          <p:cNvPr id="305" name=""/>
+          <p:cNvPr id="303" name=""/>
           <p:cNvSpPr/>
           <p:nvPr/>
         </p:nvSpPr>
         <p:spPr>
           <a:xfrm>
-            <a:off x="456840" y="3885840"/>
-            <a:ext cx="2210400" cy="10080"/>
+            <a:off x="456840" y="3600360"/>
+            <a:ext cx="2200680" cy="9720"/>
           </a:xfrm>
           <a:custGeom>
             <a:avLst/>
@@ -19526,18 +19440,18 @@
             <a:ahLst/>
             <a:rect l="0" t="0" r="r" b="b"/>
             <a:pathLst>
-              <a:path w="6140" h="28">
+              <a:path w="6113" h="27">
                 <a:moveTo>
                   <a:pt x="0" y="0"/>
                 </a:moveTo>
                 <a:lnTo>
-                  <a:pt x="6140" y="0"/>
-                </a:lnTo>
-                <a:lnTo>
-                  <a:pt x="6140" y="28"/>
-                </a:lnTo>
-                <a:lnTo>
-                  <a:pt x="0" y="28"/>
+                  <a:pt x="6113" y="0"/>
+                </a:lnTo>
+                <a:lnTo>
+                  <a:pt x="6113" y="27"/>
+                </a:lnTo>
+                <a:lnTo>
+                  <a:pt x="0" y="27"/>
                 </a:lnTo>
                 <a:lnTo>
                   <a:pt x="0" y="0"/>
@@ -19571,14 +19485,14 @@
       </p:sp>
       <p:sp>
         <p:nvSpPr>
-          <p:cNvPr id="306" name=""/>
+          <p:cNvPr id="304" name=""/>
           <p:cNvSpPr/>
           <p:nvPr/>
         </p:nvSpPr>
         <p:spPr>
           <a:xfrm>
-            <a:off x="2666880" y="3885840"/>
-            <a:ext cx="3162600" cy="10080"/>
+            <a:off x="2657160" y="3600360"/>
+            <a:ext cx="3124800" cy="9720"/>
           </a:xfrm>
           <a:custGeom>
             <a:avLst/>
@@ -19586,18 +19500,18 @@
             <a:ahLst/>
             <a:rect l="0" t="0" r="r" b="b"/>
             <a:pathLst>
-              <a:path w="8785" h="28">
+              <a:path w="8680" h="27">
                 <a:moveTo>
                   <a:pt x="0" y="0"/>
                 </a:moveTo>
                 <a:lnTo>
-                  <a:pt x="8785" y="0"/>
-                </a:lnTo>
-                <a:lnTo>
-                  <a:pt x="8785" y="28"/>
-                </a:lnTo>
-                <a:lnTo>
-                  <a:pt x="0" y="28"/>
+                  <a:pt x="8680" y="0"/>
+                </a:lnTo>
+                <a:lnTo>
+                  <a:pt x="8680" y="27"/>
+                </a:lnTo>
+                <a:lnTo>
+                  <a:pt x="0" y="27"/>
                 </a:lnTo>
                 <a:lnTo>
                   <a:pt x="0" y="0"/>
@@ -19631,14 +19545,14 @@
       </p:sp>
       <p:sp>
         <p:nvSpPr>
-          <p:cNvPr id="307" name=""/>
+          <p:cNvPr id="305" name=""/>
           <p:cNvSpPr/>
           <p:nvPr/>
         </p:nvSpPr>
         <p:spPr>
           <a:xfrm>
-            <a:off x="5829120" y="3885840"/>
-            <a:ext cx="3048480" cy="10080"/>
+            <a:off x="5781600" y="3600360"/>
+            <a:ext cx="3096000" cy="9720"/>
           </a:xfrm>
           <a:custGeom>
             <a:avLst/>
@@ -19646,18 +19560,18 @@
             <a:ahLst/>
             <a:rect l="0" t="0" r="r" b="b"/>
             <a:pathLst>
-              <a:path w="8468" h="28">
+              <a:path w="8600" h="27">
                 <a:moveTo>
                   <a:pt x="0" y="0"/>
                 </a:moveTo>
                 <a:lnTo>
-                  <a:pt x="8468" y="0"/>
-                </a:lnTo>
-                <a:lnTo>
-                  <a:pt x="8468" y="28"/>
-                </a:lnTo>
-                <a:lnTo>
-                  <a:pt x="0" y="28"/>
+                  <a:pt x="8600" y="0"/>
+                </a:lnTo>
+                <a:lnTo>
+                  <a:pt x="8600" y="27"/>
+                </a:lnTo>
+                <a:lnTo>
+                  <a:pt x="0" y="27"/>
                 </a:lnTo>
                 <a:lnTo>
                   <a:pt x="0" y="0"/>
@@ -19691,14 +19605,14 @@
       </p:sp>
       <p:sp>
         <p:nvSpPr>
-          <p:cNvPr id="308" name=""/>
+          <p:cNvPr id="306" name=""/>
           <p:cNvSpPr/>
           <p:nvPr/>
         </p:nvSpPr>
         <p:spPr>
           <a:xfrm>
-            <a:off x="456840" y="4390920"/>
-            <a:ext cx="2210400" cy="9720"/>
+            <a:off x="456840" y="4105080"/>
+            <a:ext cx="2200680" cy="9720"/>
           </a:xfrm>
           <a:custGeom>
             <a:avLst/>
@@ -19706,15 +19620,15 @@
             <a:ahLst/>
             <a:rect l="0" t="0" r="r" b="b"/>
             <a:pathLst>
-              <a:path w="6140" h="27">
+              <a:path w="6113" h="27">
                 <a:moveTo>
                   <a:pt x="0" y="0"/>
                 </a:moveTo>
                 <a:lnTo>
-                  <a:pt x="6140" y="0"/>
-                </a:lnTo>
-                <a:lnTo>
-                  <a:pt x="6140" y="27"/>
+                  <a:pt x="6113" y="0"/>
+                </a:lnTo>
+                <a:lnTo>
+                  <a:pt x="6113" y="27"/>
                 </a:lnTo>
                 <a:lnTo>
                   <a:pt x="0" y="27"/>
@@ -19751,14 +19665,14 @@
       </p:sp>
       <p:sp>
         <p:nvSpPr>
-          <p:cNvPr id="309" name=""/>
+          <p:cNvPr id="307" name=""/>
           <p:cNvSpPr/>
           <p:nvPr/>
         </p:nvSpPr>
         <p:spPr>
           <a:xfrm>
-            <a:off x="2666880" y="4390920"/>
-            <a:ext cx="3162600" cy="9720"/>
+            <a:off x="2657160" y="4105080"/>
+            <a:ext cx="3124800" cy="9720"/>
           </a:xfrm>
           <a:custGeom>
             <a:avLst/>
@@ -19766,15 +19680,15 @@
             <a:ahLst/>
             <a:rect l="0" t="0" r="r" b="b"/>
             <a:pathLst>
-              <a:path w="8785" h="27">
+              <a:path w="8680" h="27">
                 <a:moveTo>
                   <a:pt x="0" y="0"/>
                 </a:moveTo>
                 <a:lnTo>
-                  <a:pt x="8785" y="0"/>
-                </a:lnTo>
-                <a:lnTo>
-                  <a:pt x="8785" y="27"/>
+                  <a:pt x="8680" y="0"/>
+                </a:lnTo>
+                <a:lnTo>
+                  <a:pt x="8680" y="27"/>
                 </a:lnTo>
                 <a:lnTo>
                   <a:pt x="0" y="27"/>
@@ -19811,14 +19725,14 @@
       </p:sp>
       <p:sp>
         <p:nvSpPr>
-          <p:cNvPr id="310" name=""/>
+          <p:cNvPr id="308" name=""/>
           <p:cNvSpPr/>
           <p:nvPr/>
         </p:nvSpPr>
         <p:spPr>
           <a:xfrm>
-            <a:off x="5829120" y="4390920"/>
-            <a:ext cx="3048480" cy="9720"/>
+            <a:off x="5781600" y="4105080"/>
+            <a:ext cx="3096000" cy="9720"/>
           </a:xfrm>
           <a:custGeom>
             <a:avLst/>
@@ -19826,15 +19740,15 @@
             <a:ahLst/>
             <a:rect l="0" t="0" r="r" b="b"/>
             <a:pathLst>
-              <a:path w="8468" h="27">
+              <a:path w="8600" h="27">
                 <a:moveTo>
                   <a:pt x="0" y="0"/>
                 </a:moveTo>
                 <a:lnTo>
-                  <a:pt x="8468" y="0"/>
-                </a:lnTo>
-                <a:lnTo>
-                  <a:pt x="8468" y="27"/>
+                  <a:pt x="8600" y="0"/>
+                </a:lnTo>
+                <a:lnTo>
+                  <a:pt x="8600" y="27"/>
                 </a:lnTo>
                 <a:lnTo>
                   <a:pt x="0" y="27"/>
@@ -19871,14 +19785,14 @@
       </p:sp>
       <p:sp>
         <p:nvSpPr>
-          <p:cNvPr id="311" name=""/>
+          <p:cNvPr id="309" name=""/>
           <p:cNvSpPr txBox="1"/>
           <p:nvPr/>
         </p:nvSpPr>
         <p:spPr>
           <a:xfrm>
-            <a:off x="439920" y="386640"/>
-            <a:ext cx="759600" cy="399600"/>
+            <a:off x="439920" y="100800"/>
+            <a:ext cx="7616160" cy="399600"/>
           </a:xfrm>
           <a:prstGeom prst="rect">
             <a:avLst/>
@@ -19901,7 +19815,7 @@
                 <a:latin typeface="Arial"/>
                 <a:ea typeface="Arial"/>
               </a:rPr>
-              <a:t>niet</a:t>
+              <a:t>Waar OKx andere ontwikkelingen raakt</a:t>
             </a:r>
             <a:endParaRPr b="0" lang="en-US" sz="2700" spc="-1" strike="noStrike">
               <a:solidFill>
@@ -19914,13 +19828,13 @@
       </p:sp>
       <p:sp>
         <p:nvSpPr>
-          <p:cNvPr id="312" name=""/>
+          <p:cNvPr id="310" name=""/>
           <p:cNvSpPr txBox="1"/>
           <p:nvPr/>
         </p:nvSpPr>
         <p:spPr>
           <a:xfrm>
-            <a:off x="563760" y="1069920"/>
+            <a:off x="563760" y="784080"/>
             <a:ext cx="959400" cy="128520"/>
           </a:xfrm>
           <a:prstGeom prst="rect">
@@ -19957,13 +19871,13 @@
       </p:sp>
       <p:sp>
         <p:nvSpPr>
-          <p:cNvPr id="313" name=""/>
+          <p:cNvPr id="311" name=""/>
           <p:cNvSpPr txBox="1"/>
           <p:nvPr/>
         </p:nvSpPr>
         <p:spPr>
           <a:xfrm>
-            <a:off x="2775960" y="1069920"/>
+            <a:off x="2759760" y="784080"/>
             <a:ext cx="1265760" cy="128520"/>
           </a:xfrm>
           <a:prstGeom prst="rect">
@@ -20000,13 +19914,13 @@
       </p:sp>
       <p:sp>
         <p:nvSpPr>
-          <p:cNvPr id="314" name=""/>
+          <p:cNvPr id="312" name=""/>
           <p:cNvSpPr txBox="1"/>
           <p:nvPr/>
         </p:nvSpPr>
         <p:spPr>
           <a:xfrm>
-            <a:off x="5934960" y="1069920"/>
+            <a:off x="5884920" y="784080"/>
             <a:ext cx="846720" cy="128520"/>
           </a:xfrm>
           <a:prstGeom prst="rect">
@@ -20043,13 +19957,13 @@
       </p:sp>
       <p:sp>
         <p:nvSpPr>
-          <p:cNvPr id="315" name=""/>
+          <p:cNvPr id="313" name=""/>
           <p:cNvSpPr txBox="1"/>
           <p:nvPr/>
         </p:nvSpPr>
         <p:spPr>
           <a:xfrm>
-            <a:off x="563760" y="1386000"/>
+            <a:off x="563760" y="1100520"/>
             <a:ext cx="777960" cy="149760"/>
           </a:xfrm>
           <a:prstGeom prst="rect">
@@ -20086,13 +20000,13 @@
       </p:sp>
       <p:sp>
         <p:nvSpPr>
-          <p:cNvPr id="316" name=""/>
+          <p:cNvPr id="314" name=""/>
           <p:cNvSpPr txBox="1"/>
           <p:nvPr/>
         </p:nvSpPr>
         <p:spPr>
           <a:xfrm>
-            <a:off x="2775960" y="1386000"/>
+            <a:off x="2759760" y="1100520"/>
             <a:ext cx="3187440" cy="149760"/>
           </a:xfrm>
           <a:prstGeom prst="rect">
@@ -20129,13 +20043,13 @@
       </p:sp>
       <p:sp>
         <p:nvSpPr>
-          <p:cNvPr id="317" name=""/>
+          <p:cNvPr id="315" name=""/>
           <p:cNvSpPr txBox="1"/>
           <p:nvPr/>
         </p:nvSpPr>
         <p:spPr>
           <a:xfrm>
-            <a:off x="2775960" y="1576800"/>
+            <a:off x="2759760" y="1290960"/>
             <a:ext cx="2972520" cy="149760"/>
           </a:xfrm>
           <a:prstGeom prst="rect">
@@ -20172,13 +20086,13 @@
       </p:sp>
       <p:sp>
         <p:nvSpPr>
-          <p:cNvPr id="318" name=""/>
+          <p:cNvPr id="316" name=""/>
           <p:cNvSpPr txBox="1"/>
           <p:nvPr/>
         </p:nvSpPr>
         <p:spPr>
           <a:xfrm>
-            <a:off x="2775960" y="1757520"/>
+            <a:off x="2759760" y="1472040"/>
             <a:ext cx="2626560" cy="149760"/>
           </a:xfrm>
           <a:prstGeom prst="rect">
@@ -20215,14 +20129,14 @@
       </p:sp>
       <p:sp>
         <p:nvSpPr>
-          <p:cNvPr id="319" name=""/>
+          <p:cNvPr id="317" name=""/>
           <p:cNvSpPr txBox="1"/>
           <p:nvPr/>
         </p:nvSpPr>
         <p:spPr>
           <a:xfrm>
-            <a:off x="5934960" y="1386000"/>
-            <a:ext cx="3029040" cy="149760"/>
+            <a:off x="5884920" y="1100520"/>
+            <a:ext cx="3233160" cy="149760"/>
           </a:xfrm>
           <a:prstGeom prst="rect">
             <a:avLst/>
@@ -20245,7 +20159,7 @@
                 <a:latin typeface="Arial"/>
                 <a:ea typeface="Arial"/>
               </a:rPr>
-              <a:t>wij spreken over intekenen op een speciﬁcatie,</a:t>
+              <a:t>wij spreken over intekenen op een speciﬁcatie, AII</a:t>
             </a:r>
             <a:endParaRPr b="0" lang="en-US" sz="1010" spc="-1" strike="noStrike">
               <a:solidFill>
@@ -20258,14 +20172,14 @@
       </p:sp>
       <p:sp>
         <p:nvSpPr>
-          <p:cNvPr id="320" name=""/>
+          <p:cNvPr id="318" name=""/>
           <p:cNvSpPr txBox="1"/>
           <p:nvPr/>
         </p:nvSpPr>
         <p:spPr>
           <a:xfrm>
-            <a:off x="5934960" y="1576800"/>
-            <a:ext cx="3054960" cy="149760"/>
+            <a:off x="5884920" y="1290960"/>
+            <a:ext cx="2850480" cy="149760"/>
           </a:xfrm>
           <a:prstGeom prst="rect">
             <a:avLst/>
@@ -20288,7 +20202,7 @@
                 <a:latin typeface="Arial"/>
                 <a:ea typeface="Arial"/>
               </a:rPr>
-              <a:t>AII hanteert aanmelden, intekenen, inschrijven:</a:t>
+              <a:t>hanteert aanmelden, intekenen, inschrijven:</a:t>
             </a:r>
             <a:endParaRPr b="0" lang="en-US" sz="1010" spc="-1" strike="noStrike">
               <a:solidFill>
@@ -20301,13 +20215,13 @@
       </p:sp>
       <p:sp>
         <p:nvSpPr>
-          <p:cNvPr id="321" name=""/>
+          <p:cNvPr id="319" name=""/>
           <p:cNvSpPr txBox="1"/>
           <p:nvPr/>
         </p:nvSpPr>
         <p:spPr>
           <a:xfrm>
-            <a:off x="5934960" y="1757520"/>
+            <a:off x="5884920" y="1472040"/>
             <a:ext cx="1962000" cy="149760"/>
           </a:xfrm>
           <a:prstGeom prst="rect">
@@ -20344,13 +20258,13 @@
       </p:sp>
       <p:sp>
         <p:nvSpPr>
-          <p:cNvPr id="322" name=""/>
+          <p:cNvPr id="320" name=""/>
           <p:cNvSpPr txBox="1"/>
           <p:nvPr/>
         </p:nvSpPr>
         <p:spPr>
           <a:xfrm>
-            <a:off x="563760" y="2081520"/>
+            <a:off x="563760" y="1795680"/>
             <a:ext cx="893880" cy="149760"/>
           </a:xfrm>
           <a:prstGeom prst="rect">
@@ -20387,13 +20301,13 @@
       </p:sp>
       <p:sp>
         <p:nvSpPr>
-          <p:cNvPr id="323" name=""/>
+          <p:cNvPr id="321" name=""/>
           <p:cNvSpPr txBox="1"/>
           <p:nvPr/>
         </p:nvSpPr>
         <p:spPr>
           <a:xfrm>
-            <a:off x="2775960" y="2081520"/>
+            <a:off x="2759760" y="1795680"/>
             <a:ext cx="3281760" cy="149760"/>
           </a:xfrm>
           <a:prstGeom prst="rect">
@@ -20430,13 +20344,13 @@
       </p:sp>
       <p:sp>
         <p:nvSpPr>
-          <p:cNvPr id="324" name=""/>
+          <p:cNvPr id="322" name=""/>
           <p:cNvSpPr txBox="1"/>
           <p:nvPr/>
         </p:nvSpPr>
         <p:spPr>
           <a:xfrm>
-            <a:off x="2775960" y="2271960"/>
+            <a:off x="2759760" y="1986120"/>
             <a:ext cx="1222920" cy="149760"/>
           </a:xfrm>
           <a:prstGeom prst="rect">
@@ -20473,14 +20387,14 @@
       </p:sp>
       <p:sp>
         <p:nvSpPr>
-          <p:cNvPr id="325" name=""/>
+          <p:cNvPr id="323" name=""/>
           <p:cNvSpPr txBox="1"/>
           <p:nvPr/>
         </p:nvSpPr>
         <p:spPr>
           <a:xfrm>
-            <a:off x="5934960" y="2081520"/>
-            <a:ext cx="3096000" cy="149760"/>
+            <a:off x="5884920" y="1795680"/>
+            <a:ext cx="3176640" cy="149760"/>
           </a:xfrm>
           <a:prstGeom prst="rect">
             <a:avLst/>
@@ -20503,7 +20417,7 @@
                 <a:latin typeface="Arial"/>
                 <a:ea typeface="Arial"/>
               </a:rPr>
-              <a:t>OKx begint binnen de instelling, federatie is een</a:t>
+              <a:t>OKx begint binnen de instelling en federatie is de</a:t>
             </a:r>
             <a:endParaRPr b="0" lang="en-US" sz="1010" spc="-1" strike="noStrike">
               <a:solidFill>
@@ -20516,14 +20430,14 @@
       </p:sp>
       <p:sp>
         <p:nvSpPr>
-          <p:cNvPr id="326" name=""/>
+          <p:cNvPr id="324" name=""/>
           <p:cNvSpPr txBox="1"/>
           <p:nvPr/>
         </p:nvSpPr>
         <p:spPr>
           <a:xfrm>
-            <a:off x="5934960" y="2271960"/>
-            <a:ext cx="3224160" cy="149760"/>
+            <a:off x="5884920" y="1986120"/>
+            <a:ext cx="3156840" cy="149760"/>
           </a:xfrm>
           <a:prstGeom prst="rect">
             <a:avLst/>
@@ -20546,7 +20460,7 @@
                 <a:latin typeface="Arial"/>
                 <a:ea typeface="Arial"/>
               </a:rPr>
-              <a:t>latere stap; het informatiemodel als gedeelde taal</a:t>
+              <a:t>volgende stap; het informatiemodel als gedeelde</a:t>
             </a:r>
             <a:endParaRPr b="0" lang="en-US" sz="1010" spc="-1" strike="noStrike">
               <a:solidFill>
@@ -20559,14 +20473,14 @@
       </p:sp>
       <p:sp>
         <p:nvSpPr>
-          <p:cNvPr id="327" name=""/>
+          <p:cNvPr id="325" name=""/>
           <p:cNvSpPr txBox="1"/>
           <p:nvPr/>
         </p:nvSpPr>
         <p:spPr>
           <a:xfrm>
-            <a:off x="5934960" y="2453040"/>
-            <a:ext cx="1796040" cy="149760"/>
+            <a:off x="5884920" y="2167200"/>
+            <a:ext cx="2077920" cy="149760"/>
           </a:xfrm>
           <a:prstGeom prst="rect">
             <a:avLst/>
@@ -20589,7 +20503,7 @@
                 <a:latin typeface="Arial"/>
                 <a:ea typeface="Arial"/>
               </a:rPr>
-              <a:t>voor keuzedeel en resultaat</a:t>
+              <a:t>taal voor keuzedeel en resultaat</a:t>
             </a:r>
             <a:endParaRPr b="0" lang="en-US" sz="1010" spc="-1" strike="noStrike">
               <a:solidFill>
@@ -20602,13 +20516,13 @@
       </p:sp>
       <p:sp>
         <p:nvSpPr>
-          <p:cNvPr id="328" name=""/>
+          <p:cNvPr id="326" name=""/>
           <p:cNvSpPr txBox="1"/>
           <p:nvPr/>
         </p:nvSpPr>
         <p:spPr>
           <a:xfrm>
-            <a:off x="563760" y="2776680"/>
+            <a:off x="563760" y="2491200"/>
             <a:ext cx="2090160" cy="149760"/>
           </a:xfrm>
           <a:prstGeom prst="rect">
@@ -20645,13 +20559,13 @@
       </p:sp>
       <p:sp>
         <p:nvSpPr>
-          <p:cNvPr id="329" name=""/>
+          <p:cNvPr id="327" name=""/>
           <p:cNvSpPr txBox="1"/>
           <p:nvPr/>
         </p:nvSpPr>
         <p:spPr>
           <a:xfrm>
-            <a:off x="563760" y="2957760"/>
+            <a:off x="563760" y="2681640"/>
             <a:ext cx="2123640" cy="149760"/>
           </a:xfrm>
           <a:prstGeom prst="rect">
@@ -20688,13 +20602,13 @@
       </p:sp>
       <p:sp>
         <p:nvSpPr>
-          <p:cNvPr id="330" name=""/>
+          <p:cNvPr id="328" name=""/>
           <p:cNvSpPr txBox="1"/>
           <p:nvPr/>
         </p:nvSpPr>
         <p:spPr>
           <a:xfrm>
-            <a:off x="563760" y="3148200"/>
+            <a:off x="563760" y="2862360"/>
             <a:ext cx="721440" cy="149760"/>
           </a:xfrm>
           <a:prstGeom prst="rect">
@@ -20731,13 +20645,13 @@
       </p:sp>
       <p:sp>
         <p:nvSpPr>
-          <p:cNvPr id="331" name=""/>
+          <p:cNvPr id="329" name=""/>
           <p:cNvSpPr txBox="1"/>
           <p:nvPr/>
         </p:nvSpPr>
         <p:spPr>
           <a:xfrm>
-            <a:off x="2775960" y="2776680"/>
+            <a:off x="2759760" y="2491200"/>
             <a:ext cx="3156840" cy="149760"/>
           </a:xfrm>
           <a:prstGeom prst="rect">
@@ -20774,13 +20688,13 @@
       </p:sp>
       <p:sp>
         <p:nvSpPr>
-          <p:cNvPr id="332" name=""/>
+          <p:cNvPr id="330" name=""/>
           <p:cNvSpPr txBox="1"/>
           <p:nvPr/>
         </p:nvSpPr>
         <p:spPr>
           <a:xfrm>
-            <a:off x="2775960" y="2957760"/>
+            <a:off x="2759760" y="2681640"/>
             <a:ext cx="2486520" cy="149760"/>
           </a:xfrm>
           <a:prstGeom prst="rect">
@@ -20817,13 +20731,13 @@
       </p:sp>
       <p:sp>
         <p:nvSpPr>
-          <p:cNvPr id="333" name=""/>
+          <p:cNvPr id="331" name=""/>
           <p:cNvSpPr txBox="1"/>
           <p:nvPr/>
         </p:nvSpPr>
         <p:spPr>
           <a:xfrm>
-            <a:off x="5934960" y="2776680"/>
+            <a:off x="5884920" y="2491200"/>
             <a:ext cx="3130920" cy="149760"/>
           </a:xfrm>
           <a:prstGeom prst="rect">
@@ -20860,56 +20774,13 @@
       </p:sp>
       <p:sp>
         <p:nvSpPr>
-          <p:cNvPr id="334" name=""/>
+          <p:cNvPr id="332" name=""/>
           <p:cNvSpPr txBox="1"/>
           <p:nvPr/>
         </p:nvSpPr>
         <p:spPr>
           <a:xfrm>
-            <a:off x="5934960" y="2957760"/>
-            <a:ext cx="2337120" cy="149760"/>
-          </a:xfrm>
-          <a:prstGeom prst="rect">
-            <a:avLst/>
-          </a:prstGeom>
-          <a:noFill/>
-          <a:ln w="0">
-            <a:noFill/>
-          </a:ln>
-        </p:spPr>
-        <p:txBody>
-          <a:bodyPr lIns="0" rIns="0" tIns="0" bIns="0" anchor="t">
-            <a:noAutofit/>
-          </a:bodyPr>
-          <a:p>
-            <a:r>
-              <a:rPr b="0" lang="en-US" sz="1010" spc="-1" strike="noStrike">
-                <a:solidFill>
-                  <a:srgbClr val="1a1a2e"/>
-                </a:solidFill>
-                <a:latin typeface="Arial"/>
-                <a:ea typeface="Arial"/>
-              </a:rPr>
-              <a:t>in plaats van ieder een eigen dialect</a:t>
-            </a:r>
-            <a:endParaRPr b="0" lang="en-US" sz="1010" spc="-1" strike="noStrike">
-              <a:solidFill>
-                <a:srgbClr val="000000"/>
-              </a:solidFill>
-              <a:latin typeface="DejaVu Serif"/>
-            </a:endParaRPr>
-          </a:p>
-        </p:txBody>
-      </p:sp>
-      <p:sp>
-        <p:nvSpPr>
-          <p:cNvPr id="335" name=""/>
-          <p:cNvSpPr txBox="1"/>
-          <p:nvPr/>
-        </p:nvSpPr>
-        <p:spPr>
-          <a:xfrm>
-            <a:off x="563760" y="3472200"/>
+            <a:off x="563760" y="3186360"/>
             <a:ext cx="2023200" cy="149760"/>
           </a:xfrm>
           <a:prstGeom prst="rect">
@@ -20946,13 +20817,13 @@
       </p:sp>
       <p:sp>
         <p:nvSpPr>
-          <p:cNvPr id="336" name=""/>
+          <p:cNvPr id="333" name=""/>
           <p:cNvSpPr txBox="1"/>
           <p:nvPr/>
         </p:nvSpPr>
         <p:spPr>
           <a:xfrm>
-            <a:off x="2775960" y="3472200"/>
+            <a:off x="2759760" y="3186360"/>
             <a:ext cx="2679840" cy="149760"/>
           </a:xfrm>
           <a:prstGeom prst="rect">
@@ -20989,13 +20860,13 @@
       </p:sp>
       <p:sp>
         <p:nvSpPr>
-          <p:cNvPr id="337" name=""/>
+          <p:cNvPr id="334" name=""/>
           <p:cNvSpPr txBox="1"/>
           <p:nvPr/>
         </p:nvSpPr>
         <p:spPr>
           <a:xfrm>
-            <a:off x="2775960" y="3653280"/>
+            <a:off x="2759760" y="3376800"/>
             <a:ext cx="2045880" cy="149760"/>
           </a:xfrm>
           <a:prstGeom prst="rect">
@@ -21032,13 +20903,13 @@
       </p:sp>
       <p:sp>
         <p:nvSpPr>
-          <p:cNvPr id="338" name=""/>
+          <p:cNvPr id="335" name=""/>
           <p:cNvSpPr txBox="1"/>
           <p:nvPr/>
         </p:nvSpPr>
         <p:spPr>
           <a:xfrm>
-            <a:off x="5934960" y="3472200"/>
+            <a:off x="5884920" y="3186360"/>
             <a:ext cx="3160080" cy="149760"/>
           </a:xfrm>
           <a:prstGeom prst="rect">
@@ -21075,13 +20946,13 @@
       </p:sp>
       <p:sp>
         <p:nvSpPr>
-          <p:cNvPr id="339" name=""/>
+          <p:cNvPr id="336" name=""/>
           <p:cNvSpPr txBox="1"/>
           <p:nvPr/>
         </p:nvSpPr>
         <p:spPr>
           <a:xfrm>
-            <a:off x="5934960" y="3653280"/>
+            <a:off x="5884920" y="3376800"/>
             <a:ext cx="1293120" cy="149760"/>
           </a:xfrm>
           <a:prstGeom prst="rect">
@@ -21118,13 +20989,13 @@
       </p:sp>
       <p:sp>
         <p:nvSpPr>
-          <p:cNvPr id="340" name=""/>
+          <p:cNvPr id="337" name=""/>
           <p:cNvSpPr txBox="1"/>
           <p:nvPr/>
         </p:nvSpPr>
         <p:spPr>
           <a:xfrm>
-            <a:off x="563760" y="3976920"/>
+            <a:off x="563760" y="3700800"/>
             <a:ext cx="255240" cy="149760"/>
           </a:xfrm>
           <a:prstGeom prst="rect">
@@ -21161,13 +21032,13 @@
       </p:sp>
       <p:sp>
         <p:nvSpPr>
-          <p:cNvPr id="341" name=""/>
+          <p:cNvPr id="338" name=""/>
           <p:cNvSpPr txBox="1"/>
           <p:nvPr/>
         </p:nvSpPr>
         <p:spPr>
           <a:xfrm>
-            <a:off x="2775960" y="3976920"/>
+            <a:off x="2759760" y="3700800"/>
             <a:ext cx="3018240" cy="149760"/>
           </a:xfrm>
           <a:prstGeom prst="rect">
@@ -21204,13 +21075,13 @@
       </p:sp>
       <p:sp>
         <p:nvSpPr>
-          <p:cNvPr id="342" name=""/>
+          <p:cNvPr id="339" name=""/>
           <p:cNvSpPr txBox="1"/>
           <p:nvPr/>
         </p:nvSpPr>
         <p:spPr>
           <a:xfrm>
-            <a:off x="2775960" y="4167360"/>
+            <a:off x="2759760" y="3881880"/>
             <a:ext cx="950040" cy="149760"/>
           </a:xfrm>
           <a:prstGeom prst="rect">
@@ -21247,13 +21118,13 @@
       </p:sp>
       <p:sp>
         <p:nvSpPr>
-          <p:cNvPr id="343" name=""/>
+          <p:cNvPr id="340" name=""/>
           <p:cNvSpPr/>
           <p:nvPr/>
         </p:nvSpPr>
         <p:spPr>
           <a:xfrm>
-            <a:off x="456840" y="4495680"/>
+            <a:off x="456840" y="4209840"/>
             <a:ext cx="4115160" cy="752760"/>
           </a:xfrm>
           <a:custGeom>
@@ -21305,13 +21176,13 @@
       </p:sp>
       <p:sp>
         <p:nvSpPr>
-          <p:cNvPr id="344" name=""/>
+          <p:cNvPr id="341" name=""/>
           <p:cNvSpPr/>
           <p:nvPr/>
         </p:nvSpPr>
         <p:spPr>
           <a:xfrm>
-            <a:off x="456840" y="4495680"/>
+            <a:off x="456840" y="4209840"/>
             <a:ext cx="4115160" cy="38520"/>
           </a:xfrm>
           <a:custGeom>
@@ -21363,13 +21234,13 @@
       </p:sp>
       <p:sp>
         <p:nvSpPr>
-          <p:cNvPr id="345" name=""/>
+          <p:cNvPr id="342" name=""/>
           <p:cNvSpPr/>
           <p:nvPr/>
         </p:nvSpPr>
         <p:spPr>
           <a:xfrm>
-            <a:off x="456840" y="5238720"/>
+            <a:off x="456840" y="4952880"/>
             <a:ext cx="4115160" cy="9720"/>
           </a:xfrm>
           <a:custGeom>
@@ -21421,13 +21292,13 @@
       </p:sp>
       <p:sp>
         <p:nvSpPr>
-          <p:cNvPr id="346" name=""/>
+          <p:cNvPr id="343" name=""/>
           <p:cNvSpPr/>
           <p:nvPr/>
         </p:nvSpPr>
         <p:spPr>
           <a:xfrm>
-            <a:off x="4562280" y="4495680"/>
+            <a:off x="4562280" y="4209840"/>
             <a:ext cx="9720" cy="752760"/>
           </a:xfrm>
           <a:custGeom>
@@ -21479,13 +21350,13 @@
       </p:sp>
       <p:sp>
         <p:nvSpPr>
-          <p:cNvPr id="347" name=""/>
+          <p:cNvPr id="344" name=""/>
           <p:cNvSpPr/>
           <p:nvPr/>
         </p:nvSpPr>
         <p:spPr>
           <a:xfrm>
-            <a:off x="456840" y="4495680"/>
+            <a:off x="456840" y="4209840"/>
             <a:ext cx="10080" cy="752760"/>
           </a:xfrm>
           <a:custGeom>
@@ -21537,13 +21408,13 @@
       </p:sp>
       <p:sp>
         <p:nvSpPr>
-          <p:cNvPr id="348" name=""/>
+          <p:cNvPr id="345" name=""/>
           <p:cNvSpPr txBox="1"/>
           <p:nvPr/>
         </p:nvSpPr>
         <p:spPr>
           <a:xfrm>
-            <a:off x="5934960" y="3976920"/>
+            <a:off x="5884920" y="3700800"/>
             <a:ext cx="2980080" cy="149760"/>
           </a:xfrm>
           <a:prstGeom prst="rect">
@@ -21580,14 +21451,14 @@
       </p:sp>
       <p:sp>
         <p:nvSpPr>
-          <p:cNvPr id="349" name=""/>
+          <p:cNvPr id="346" name=""/>
           <p:cNvSpPr txBox="1"/>
           <p:nvPr/>
         </p:nvSpPr>
         <p:spPr>
           <a:xfrm>
-            <a:off x="603720" y="4634280"/>
-            <a:ext cx="3957120" cy="149760"/>
+            <a:off x="603720" y="4348440"/>
+            <a:ext cx="4324320" cy="149760"/>
           </a:xfrm>
           <a:prstGeom prst="rect">
             <a:avLst/>
@@ -21610,7 +21481,7 @@
                 <a:latin typeface="Arial"/>
                 <a:ea typeface="Arial"/>
               </a:rPr>
-              <a:t>Wel OKx:</a:t>
+              <a:t>OKx gaat over</a:t>
             </a:r>
             <a:r>
               <a:rPr b="0" lang="en-US" sz="1010" spc="-1" strike="noStrike">
@@ -21633,13 +21504,13 @@
       </p:sp>
       <p:sp>
         <p:nvSpPr>
-          <p:cNvPr id="350" name=""/>
+          <p:cNvPr id="347" name=""/>
           <p:cNvSpPr txBox="1"/>
           <p:nvPr/>
         </p:nvSpPr>
         <p:spPr>
           <a:xfrm>
-            <a:off x="603720" y="4815000"/>
+            <a:off x="603720" y="4529520"/>
             <a:ext cx="4287600" cy="149760"/>
           </a:xfrm>
           <a:prstGeom prst="rect">
@@ -21676,14 +21547,14 @@
       </p:sp>
       <p:sp>
         <p:nvSpPr>
-          <p:cNvPr id="351" name=""/>
+          <p:cNvPr id="348" name=""/>
           <p:cNvSpPr/>
           <p:nvPr/>
         </p:nvSpPr>
         <p:spPr>
           <a:xfrm>
-            <a:off x="4762440" y="4495680"/>
-            <a:ext cx="4115160" cy="752760"/>
+            <a:off x="4762440" y="4209840"/>
+            <a:ext cx="4115160" cy="943200"/>
           </a:xfrm>
           <a:custGeom>
             <a:avLst/>
@@ -21691,7 +21562,7 @@
             <a:ahLst/>
             <a:rect l="0" t="0" r="r" b="b"/>
             <a:pathLst>
-              <a:path w="11431" h="2091">
+              <a:path w="11431" h="2620">
                 <a:moveTo>
                   <a:pt x="0" y="0"/>
                 </a:moveTo>
@@ -21699,10 +21570,10 @@
                   <a:pt x="11431" y="0"/>
                 </a:lnTo>
                 <a:lnTo>
-                  <a:pt x="11431" y="2091"/>
-                </a:lnTo>
-                <a:lnTo>
-                  <a:pt x="0" y="2091"/>
+                  <a:pt x="11431" y="2620"/>
+                </a:lnTo>
+                <a:lnTo>
+                  <a:pt x="0" y="2620"/>
                 </a:lnTo>
                 <a:lnTo>
                   <a:pt x="0" y="0"/>
@@ -21734,13 +21605,13 @@
       </p:sp>
       <p:sp>
         <p:nvSpPr>
-          <p:cNvPr id="352" name=""/>
+          <p:cNvPr id="349" name=""/>
           <p:cNvSpPr/>
           <p:nvPr/>
         </p:nvSpPr>
         <p:spPr>
           <a:xfrm>
-            <a:off x="4762440" y="4495680"/>
+            <a:off x="4762440" y="4209840"/>
             <a:ext cx="4115160" cy="38520"/>
           </a:xfrm>
           <a:custGeom>
@@ -21770,7 +21641,7 @@
             </a:pathLst>
           </a:custGeom>
           <a:solidFill>
-            <a:srgbClr val="dd784b"/>
+            <a:srgbClr val="3d68ec"/>
           </a:solidFill>
           <a:ln w="0">
             <a:noFill/>
@@ -21792,13 +21663,13 @@
       </p:sp>
       <p:sp>
         <p:nvSpPr>
-          <p:cNvPr id="353" name=""/>
+          <p:cNvPr id="350" name=""/>
           <p:cNvSpPr/>
           <p:nvPr/>
         </p:nvSpPr>
         <p:spPr>
           <a:xfrm>
-            <a:off x="4762440" y="5238720"/>
+            <a:off x="4762440" y="5143320"/>
             <a:ext cx="4115160" cy="9720"/>
           </a:xfrm>
           <a:custGeom>
@@ -21850,14 +21721,14 @@
       </p:sp>
       <p:sp>
         <p:nvSpPr>
-          <p:cNvPr id="354" name=""/>
+          <p:cNvPr id="351" name=""/>
           <p:cNvSpPr/>
           <p:nvPr/>
         </p:nvSpPr>
         <p:spPr>
           <a:xfrm>
-            <a:off x="8867520" y="4495680"/>
-            <a:ext cx="10080" cy="752760"/>
+            <a:off x="8867520" y="4209840"/>
+            <a:ext cx="10080" cy="943200"/>
           </a:xfrm>
           <a:custGeom>
             <a:avLst/>
@@ -21865,21 +21736,21 @@
             <a:ahLst/>
             <a:rect l="0" t="0" r="r" b="b"/>
             <a:pathLst>
-              <a:path w="28" h="2091">
+              <a:path w="28" h="2620">
                 <a:moveTo>
-                  <a:pt x="0" y="106"/>
+                  <a:pt x="0" y="107"/>
                 </a:moveTo>
                 <a:lnTo>
-                  <a:pt x="0" y="2091"/>
-                </a:lnTo>
-                <a:lnTo>
-                  <a:pt x="28" y="2091"/>
+                  <a:pt x="0" y="2620"/>
+                </a:lnTo>
+                <a:lnTo>
+                  <a:pt x="28" y="2620"/>
                 </a:lnTo>
                 <a:lnTo>
                   <a:pt x="28" y="0"/>
                 </a:lnTo>
                 <a:lnTo>
-                  <a:pt x="0" y="106"/>
+                  <a:pt x="0" y="107"/>
                 </a:lnTo>
                 <a:close/>
               </a:path>
@@ -21908,14 +21779,14 @@
       </p:sp>
       <p:sp>
         <p:nvSpPr>
-          <p:cNvPr id="355" name=""/>
+          <p:cNvPr id="352" name=""/>
           <p:cNvSpPr/>
           <p:nvPr/>
         </p:nvSpPr>
         <p:spPr>
           <a:xfrm>
-            <a:off x="4762440" y="4495680"/>
-            <a:ext cx="9720" cy="752760"/>
+            <a:off x="4762440" y="4209840"/>
+            <a:ext cx="9720" cy="943200"/>
           </a:xfrm>
           <a:custGeom>
             <a:avLst/>
@@ -21923,18 +21794,18 @@
             <a:ahLst/>
             <a:rect l="0" t="0" r="r" b="b"/>
             <a:pathLst>
-              <a:path w="27" h="2091">
+              <a:path w="27" h="2620">
                 <a:moveTo>
                   <a:pt x="0" y="0"/>
                 </a:moveTo>
                 <a:lnTo>
-                  <a:pt x="0" y="2091"/>
-                </a:lnTo>
-                <a:lnTo>
-                  <a:pt x="27" y="2091"/>
-                </a:lnTo>
-                <a:lnTo>
-                  <a:pt x="27" y="106"/>
+                  <a:pt x="0" y="2620"/>
+                </a:lnTo>
+                <a:lnTo>
+                  <a:pt x="27" y="2620"/>
+                </a:lnTo>
+                <a:lnTo>
+                  <a:pt x="27" y="107"/>
                 </a:lnTo>
                 <a:lnTo>
                   <a:pt x="0" y="0"/>
@@ -21966,13 +21837,13 @@
       </p:sp>
       <p:sp>
         <p:nvSpPr>
-          <p:cNvPr id="356" name=""/>
+          <p:cNvPr id="353" name=""/>
           <p:cNvSpPr txBox="1"/>
           <p:nvPr/>
         </p:nvSpPr>
         <p:spPr>
           <a:xfrm>
-            <a:off x="603720" y="5005800"/>
+            <a:off x="603720" y="4719960"/>
             <a:ext cx="2588400" cy="149760"/>
           </a:xfrm>
           <a:prstGeom prst="rect">
@@ -22009,14 +21880,14 @@
       </p:sp>
       <p:sp>
         <p:nvSpPr>
-          <p:cNvPr id="357" name=""/>
+          <p:cNvPr id="354" name=""/>
           <p:cNvSpPr txBox="1"/>
           <p:nvPr/>
         </p:nvSpPr>
         <p:spPr>
           <a:xfrm>
-            <a:off x="4905360" y="4634280"/>
-            <a:ext cx="4066920" cy="149760"/>
+            <a:off x="4905360" y="4348440"/>
+            <a:ext cx="3867120" cy="149760"/>
           </a:xfrm>
           <a:prstGeom prst="rect">
             <a:avLst/>
@@ -22039,7 +21910,7 @@
                 <a:latin typeface="Arial"/>
                 <a:ea typeface="Arial"/>
               </a:rPr>
-              <a:t>Niet OKx:</a:t>
+              <a:t>De grens:</a:t>
             </a:r>
             <a:r>
               <a:rPr b="0" lang="en-US" sz="1010" spc="-1" strike="noStrike">
@@ -22049,7 +21920,7 @@
                 <a:latin typeface="Arial"/>
                 <a:ea typeface="Arial"/>
               </a:rPr>
-              <a:t> de functionaliteit binnen een applicatie, uitwisseling</a:t>
+              <a:t> de functionaliteit binnen een applicatie is van de</a:t>
             </a:r>
             <a:endParaRPr b="0" lang="en-US" sz="1010" spc="-1" strike="noStrike">
               <a:solidFill>
@@ -22062,14 +21933,14 @@
       </p:sp>
       <p:sp>
         <p:nvSpPr>
-          <p:cNvPr id="358" name=""/>
+          <p:cNvPr id="355" name=""/>
           <p:cNvSpPr txBox="1"/>
           <p:nvPr/>
         </p:nvSpPr>
         <p:spPr>
           <a:xfrm>
-            <a:off x="4905360" y="4815000"/>
-            <a:ext cx="3752640" cy="149760"/>
+            <a:off x="4905360" y="4529520"/>
+            <a:ext cx="4321440" cy="149760"/>
           </a:xfrm>
           <a:prstGeom prst="rect">
             <a:avLst/>
@@ -22092,7 +21963,7 @@
                 <a:latin typeface="Arial"/>
                 <a:ea typeface="Arial"/>
               </a:rPr>
-              <a:t>onder de leeractiviteit, roosteralgoritmes, didactiek, en de</a:t>
+              <a:t>leverancier, alles onder de leeractiviteit en de didactiek zijn van de</a:t>
             </a:r>
             <a:endParaRPr b="0" lang="en-US" sz="1010" spc="-1" strike="noStrike">
               <a:solidFill>
@@ -22105,72 +21976,14 @@
       </p:sp>
       <p:sp>
         <p:nvSpPr>
-          <p:cNvPr id="359" name=""/>
-          <p:cNvSpPr/>
-          <p:nvPr/>
-        </p:nvSpPr>
-        <p:spPr>
-          <a:xfrm>
-            <a:off x="0" y="5257440"/>
-            <a:ext cx="9334800" cy="5258160"/>
-          </a:xfrm>
-          <a:custGeom>
-            <a:avLst/>
-            <a:gdLst/>
-            <a:ahLst/>
-            <a:rect l="0" t="0" r="r" b="b"/>
-            <a:pathLst>
-              <a:path w="25930" h="14606">
-                <a:moveTo>
-                  <a:pt x="0" y="0"/>
-                </a:moveTo>
-                <a:lnTo>
-                  <a:pt x="25930" y="0"/>
-                </a:lnTo>
-                <a:lnTo>
-                  <a:pt x="25930" y="14606"/>
-                </a:lnTo>
-                <a:lnTo>
-                  <a:pt x="0" y="14606"/>
-                </a:lnTo>
-                <a:lnTo>
-                  <a:pt x="0" y="0"/>
-                </a:lnTo>
-                <a:close/>
-              </a:path>
-            </a:pathLst>
-          </a:custGeom>
-          <a:solidFill>
-            <a:srgbClr val="ffffff"/>
-          </a:solidFill>
-          <a:ln w="0">
-            <a:noFill/>
-          </a:ln>
-        </p:spPr>
-        <p:txBody>
-          <a:bodyPr lIns="0" rIns="0" tIns="0" bIns="0" anchor="t">
-            <a:noAutofit/>
-          </a:bodyPr>
-          <a:p>
-            <a:endParaRPr b="0" lang="en-US" sz="2400" spc="-1" strike="noStrike">
-              <a:solidFill>
-                <a:srgbClr val="000000"/>
-              </a:solidFill>
-              <a:latin typeface="DejaVu Serif"/>
-            </a:endParaRPr>
-          </a:p>
-        </p:txBody>
-      </p:sp>
-      <p:sp>
-        <p:nvSpPr>
-          <p:cNvPr id="360" name=""/>
+          <p:cNvPr id="356" name=""/>
           <p:cNvSpPr txBox="1"/>
           <p:nvPr/>
         </p:nvSpPr>
         <p:spPr>
           <a:xfrm>
-            <a:off x="4905360" y="5005800"/>
-            <a:ext cx="1867680" cy="149760"/>
+            <a:off x="4905360" y="4719960"/>
+            <a:ext cx="4092840" cy="149760"/>
           </a:xfrm>
           <a:prstGeom prst="rect">
             <a:avLst/>
@@ -22193,7 +22006,108 @@
                 <a:latin typeface="Arial"/>
                 <a:ea typeface="Arial"/>
               </a:rPr>
-              <a:t>landelijke voorzieningen zelf.</a:t>
+              <a:t>instelling, roosteren is van het roostersysteem, en de landelijke</a:t>
+            </a:r>
+            <a:endParaRPr b="0" lang="en-US" sz="1010" spc="-1" strike="noStrike">
+              <a:solidFill>
+                <a:srgbClr val="000000"/>
+              </a:solidFill>
+              <a:latin typeface="DejaVu Serif"/>
+            </a:endParaRPr>
+          </a:p>
+        </p:txBody>
+      </p:sp>
+      <p:sp>
+        <p:nvSpPr>
+          <p:cNvPr id="357" name=""/>
+          <p:cNvSpPr/>
+          <p:nvPr/>
+        </p:nvSpPr>
+        <p:spPr>
+          <a:xfrm>
+            <a:off x="0" y="5257440"/>
+            <a:ext cx="9334800" cy="5258160"/>
+          </a:xfrm>
+          <a:custGeom>
+            <a:avLst/>
+            <a:gdLst/>
+            <a:ahLst/>
+            <a:rect l="0" t="0" r="r" b="b"/>
+            <a:pathLst>
+              <a:path w="25930" h="14606">
+                <a:moveTo>
+                  <a:pt x="0" y="0"/>
+                </a:moveTo>
+                <a:lnTo>
+                  <a:pt x="25930" y="0"/>
+                </a:lnTo>
+                <a:lnTo>
+                  <a:pt x="25930" y="14606"/>
+                </a:lnTo>
+                <a:lnTo>
+                  <a:pt x="0" y="14606"/>
+                </a:lnTo>
+                <a:lnTo>
+                  <a:pt x="0" y="0"/>
+                </a:lnTo>
+                <a:close/>
+              </a:path>
+            </a:pathLst>
+          </a:custGeom>
+          <a:solidFill>
+            <a:srgbClr val="ffffff"/>
+          </a:solidFill>
+          <a:ln w="0">
+            <a:noFill/>
+          </a:ln>
+        </p:spPr>
+        <p:txBody>
+          <a:bodyPr lIns="0" rIns="0" tIns="0" bIns="0" anchor="t">
+            <a:noAutofit/>
+          </a:bodyPr>
+          <a:p>
+            <a:endParaRPr b="0" lang="en-US" sz="2400" spc="-1" strike="noStrike">
+              <a:solidFill>
+                <a:srgbClr val="000000"/>
+              </a:solidFill>
+              <a:latin typeface="DejaVu Serif"/>
+            </a:endParaRPr>
+          </a:p>
+        </p:txBody>
+      </p:sp>
+      <p:sp>
+        <p:nvSpPr>
+          <p:cNvPr id="358" name=""/>
+          <p:cNvSpPr txBox="1"/>
+          <p:nvPr/>
+        </p:nvSpPr>
+        <p:spPr>
+          <a:xfrm>
+            <a:off x="4905360" y="4901040"/>
+            <a:ext cx="2520000" cy="149760"/>
+          </a:xfrm>
+          <a:prstGeom prst="rect">
+            <a:avLst/>
+          </a:prstGeom>
+          <a:noFill/>
+          <a:ln w="0">
+            <a:noFill/>
+          </a:ln>
+        </p:spPr>
+        <p:txBody>
+          <a:bodyPr lIns="0" rIns="0" tIns="0" bIns="0" anchor="t">
+            <a:noAutofit/>
+          </a:bodyPr>
+          <a:p>
+            <a:r>
+              <a:rPr b="0" lang="en-US" sz="1010" spc="-1" strike="noStrike">
+                <a:solidFill>
+                  <a:srgbClr val="1a1a2e"/>
+                </a:solidFill>
+                <a:latin typeface="Arial"/>
+                <a:ea typeface="Arial"/>
+              </a:rPr>
+              <a:t>voorzieningen zijn van hun eigen pijler.</a:t>
             </a:r>
             <a:endParaRPr b="0" lang="en-US" sz="1010" spc="-1" strike="noStrike">
               <a:solidFill>
@@ -22236,7 +22150,7 @@
       </p:grpSpPr>
       <p:sp>
         <p:nvSpPr>
-          <p:cNvPr id="361" name=""/>
+          <p:cNvPr id="359" name=""/>
           <p:cNvSpPr/>
           <p:nvPr/>
         </p:nvSpPr>
@@ -22294,7 +22208,7 @@
       </p:sp>
       <p:sp>
         <p:nvSpPr>
-          <p:cNvPr id="362" name=""/>
+          <p:cNvPr id="360" name=""/>
           <p:cNvSpPr/>
           <p:nvPr/>
         </p:nvSpPr>
@@ -22352,7 +22266,7 @@
       </p:sp>
       <p:sp>
         <p:nvSpPr>
-          <p:cNvPr id="363" name=""/>
+          <p:cNvPr id="361" name=""/>
           <p:cNvSpPr/>
           <p:nvPr/>
         </p:nvSpPr>
@@ -22410,7 +22324,7 @@
       </p:sp>
       <p:sp>
         <p:nvSpPr>
-          <p:cNvPr id="364" name=""/>
+          <p:cNvPr id="362" name=""/>
           <p:cNvSpPr/>
           <p:nvPr/>
         </p:nvSpPr>
@@ -22468,7 +22382,7 @@
       </p:sp>
       <p:sp>
         <p:nvSpPr>
-          <p:cNvPr id="365" name=""/>
+          <p:cNvPr id="363" name=""/>
           <p:cNvSpPr/>
           <p:nvPr/>
         </p:nvSpPr>
@@ -22526,7 +22440,7 @@
       </p:sp>
       <p:sp>
         <p:nvSpPr>
-          <p:cNvPr id="366" name=""/>
+          <p:cNvPr id="364" name=""/>
           <p:cNvSpPr/>
           <p:nvPr/>
         </p:nvSpPr>
@@ -22584,7 +22498,7 @@
       </p:sp>
       <p:pic>
         <p:nvPicPr>
-          <p:cNvPr id="367" name="" descr=""/>
+          <p:cNvPr id="365" name="" descr=""/>
           <p:cNvPicPr/>
           <p:nvPr/>
         </p:nvPicPr>
@@ -22607,7 +22521,7 @@
       </p:pic>
       <p:sp>
         <p:nvSpPr>
-          <p:cNvPr id="368" name=""/>
+          <p:cNvPr id="366" name=""/>
           <p:cNvSpPr txBox="1"/>
           <p:nvPr/>
         </p:nvSpPr>
@@ -22650,7 +22564,7 @@
       </p:sp>
       <p:sp>
         <p:nvSpPr>
-          <p:cNvPr id="369" name=""/>
+          <p:cNvPr id="367" name=""/>
           <p:cNvSpPr txBox="1"/>
           <p:nvPr/>
         </p:nvSpPr>
@@ -22693,7 +22607,7 @@
       </p:sp>
       <p:sp>
         <p:nvSpPr>
-          <p:cNvPr id="370" name=""/>
+          <p:cNvPr id="368" name=""/>
           <p:cNvSpPr/>
           <p:nvPr/>
         </p:nvSpPr>
@@ -22831,7 +22745,7 @@
       </p:sp>
       <p:sp>
         <p:nvSpPr>
-          <p:cNvPr id="371" name=""/>
+          <p:cNvPr id="369" name=""/>
           <p:cNvSpPr txBox="1"/>
           <p:nvPr/>
         </p:nvSpPr>
@@ -22874,7 +22788,7 @@
       </p:sp>
       <p:sp>
         <p:nvSpPr>
-          <p:cNvPr id="372" name=""/>
+          <p:cNvPr id="370" name=""/>
           <p:cNvSpPr txBox="1"/>
           <p:nvPr/>
         </p:nvSpPr>
@@ -22917,7 +22831,7 @@
       </p:sp>
       <p:sp>
         <p:nvSpPr>
-          <p:cNvPr id="373" name=""/>
+          <p:cNvPr id="371" name=""/>
           <p:cNvSpPr/>
           <p:nvPr/>
         </p:nvSpPr>
@@ -23055,7 +22969,7 @@
       </p:sp>
       <p:sp>
         <p:nvSpPr>
-          <p:cNvPr id="374" name=""/>
+          <p:cNvPr id="372" name=""/>
           <p:cNvSpPr txBox="1"/>
           <p:nvPr/>
         </p:nvSpPr>
@@ -23098,7 +23012,7 @@
       </p:sp>
       <p:sp>
         <p:nvSpPr>
-          <p:cNvPr id="375" name=""/>
+          <p:cNvPr id="373" name=""/>
           <p:cNvSpPr txBox="1"/>
           <p:nvPr/>
         </p:nvSpPr>
@@ -23141,7 +23055,7 @@
       </p:sp>
       <p:sp>
         <p:nvSpPr>
-          <p:cNvPr id="376" name=""/>
+          <p:cNvPr id="374" name=""/>
           <p:cNvSpPr/>
           <p:nvPr/>
         </p:nvSpPr>
@@ -23279,7 +23193,7 @@
       </p:sp>
       <p:sp>
         <p:nvSpPr>
-          <p:cNvPr id="377" name=""/>
+          <p:cNvPr id="375" name=""/>
           <p:cNvSpPr txBox="1"/>
           <p:nvPr/>
         </p:nvSpPr>
@@ -23332,7 +23246,7 @@
       </p:sp>
       <p:sp>
         <p:nvSpPr>
-          <p:cNvPr id="378" name=""/>
+          <p:cNvPr id="376" name=""/>
           <p:cNvSpPr txBox="1"/>
           <p:nvPr/>
         </p:nvSpPr>
@@ -23375,7 +23289,7 @@
       </p:sp>
       <p:sp>
         <p:nvSpPr>
-          <p:cNvPr id="379" name=""/>
+          <p:cNvPr id="377" name=""/>
           <p:cNvSpPr txBox="1"/>
           <p:nvPr/>
         </p:nvSpPr>
@@ -23418,7 +23332,7 @@
       </p:sp>
       <p:sp>
         <p:nvSpPr>
-          <p:cNvPr id="380" name=""/>
+          <p:cNvPr id="378" name=""/>
           <p:cNvSpPr/>
           <p:nvPr/>
         </p:nvSpPr>
@@ -23636,7 +23550,7 @@
       </p:sp>
       <p:sp>
         <p:nvSpPr>
-          <p:cNvPr id="381" name=""/>
+          <p:cNvPr id="379" name=""/>
           <p:cNvSpPr/>
           <p:nvPr/>
         </p:nvSpPr>
@@ -23855,7 +23769,7 @@
       </p:sp>
       <p:sp>
         <p:nvSpPr>
-          <p:cNvPr id="382" name=""/>
+          <p:cNvPr id="380" name=""/>
           <p:cNvSpPr txBox="1"/>
           <p:nvPr/>
         </p:nvSpPr>
@@ -23898,7 +23812,7 @@
       </p:sp>
       <p:sp>
         <p:nvSpPr>
-          <p:cNvPr id="383" name=""/>
+          <p:cNvPr id="381" name=""/>
           <p:cNvSpPr txBox="1"/>
           <p:nvPr/>
         </p:nvSpPr>
@@ -23941,7 +23855,7 @@
       </p:sp>
       <p:sp>
         <p:nvSpPr>
-          <p:cNvPr id="384" name=""/>
+          <p:cNvPr id="382" name=""/>
           <p:cNvSpPr txBox="1"/>
           <p:nvPr/>
         </p:nvSpPr>
@@ -23984,7 +23898,7 @@
       </p:sp>
       <p:sp>
         <p:nvSpPr>
-          <p:cNvPr id="385" name=""/>
+          <p:cNvPr id="383" name=""/>
           <p:cNvSpPr txBox="1"/>
           <p:nvPr/>
         </p:nvSpPr>
@@ -24027,7 +23941,7 @@
       </p:sp>
       <p:sp>
         <p:nvSpPr>
-          <p:cNvPr id="386" name=""/>
+          <p:cNvPr id="384" name=""/>
           <p:cNvSpPr/>
           <p:nvPr/>
         </p:nvSpPr>
@@ -24068,7 +23982,7 @@
       </p:sp>
       <p:sp>
         <p:nvSpPr>
-          <p:cNvPr id="387" name=""/>
+          <p:cNvPr id="385" name=""/>
           <p:cNvSpPr/>
           <p:nvPr/>
         </p:nvSpPr>
@@ -24286,7 +24200,7 @@
       </p:sp>
       <p:sp>
         <p:nvSpPr>
-          <p:cNvPr id="388" name=""/>
+          <p:cNvPr id="386" name=""/>
           <p:cNvSpPr/>
           <p:nvPr/>
         </p:nvSpPr>
@@ -24505,7 +24419,7 @@
       </p:sp>
       <p:sp>
         <p:nvSpPr>
-          <p:cNvPr id="389" name=""/>
+          <p:cNvPr id="387" name=""/>
           <p:cNvSpPr txBox="1"/>
           <p:nvPr/>
         </p:nvSpPr>
@@ -24548,7 +24462,7 @@
       </p:sp>
       <p:sp>
         <p:nvSpPr>
-          <p:cNvPr id="390" name=""/>
+          <p:cNvPr id="388" name=""/>
           <p:cNvSpPr txBox="1"/>
           <p:nvPr/>
         </p:nvSpPr>
@@ -24591,7 +24505,7 @@
       </p:sp>
       <p:sp>
         <p:nvSpPr>
-          <p:cNvPr id="391" name=""/>
+          <p:cNvPr id="389" name=""/>
           <p:cNvSpPr txBox="1"/>
           <p:nvPr/>
         </p:nvSpPr>
@@ -24634,7 +24548,7 @@
       </p:sp>
       <p:sp>
         <p:nvSpPr>
-          <p:cNvPr id="392" name=""/>
+          <p:cNvPr id="390" name=""/>
           <p:cNvSpPr/>
           <p:nvPr/>
         </p:nvSpPr>
@@ -24852,7 +24766,7 @@
       </p:sp>
       <p:sp>
         <p:nvSpPr>
-          <p:cNvPr id="393" name=""/>
+          <p:cNvPr id="391" name=""/>
           <p:cNvSpPr/>
           <p:nvPr/>
         </p:nvSpPr>
@@ -25071,7 +24985,7 @@
       </p:sp>
       <p:sp>
         <p:nvSpPr>
-          <p:cNvPr id="394" name=""/>
+          <p:cNvPr id="392" name=""/>
           <p:cNvSpPr txBox="1"/>
           <p:nvPr/>
         </p:nvSpPr>
@@ -25114,7 +25028,7 @@
       </p:sp>
       <p:sp>
         <p:nvSpPr>
-          <p:cNvPr id="395" name=""/>
+          <p:cNvPr id="393" name=""/>
           <p:cNvSpPr txBox="1"/>
           <p:nvPr/>
         </p:nvSpPr>
@@ -25157,7 +25071,7 @@
       </p:sp>
       <p:sp>
         <p:nvSpPr>
-          <p:cNvPr id="396" name=""/>
+          <p:cNvPr id="394" name=""/>
           <p:cNvSpPr txBox="1"/>
           <p:nvPr/>
         </p:nvSpPr>
@@ -25200,7 +25114,7 @@
       </p:sp>
       <p:sp>
         <p:nvSpPr>
-          <p:cNvPr id="397" name=""/>
+          <p:cNvPr id="395" name=""/>
           <p:cNvSpPr/>
           <p:nvPr/>
         </p:nvSpPr>
@@ -25421,7 +25335,7 @@
       </p:sp>
       <p:sp>
         <p:nvSpPr>
-          <p:cNvPr id="398" name=""/>
+          <p:cNvPr id="396" name=""/>
           <p:cNvSpPr txBox="1"/>
           <p:nvPr/>
         </p:nvSpPr>
@@ -25464,7 +25378,7 @@
       </p:sp>
       <p:sp>
         <p:nvSpPr>
-          <p:cNvPr id="399" name=""/>
+          <p:cNvPr id="397" name=""/>
           <p:cNvSpPr txBox="1"/>
           <p:nvPr/>
         </p:nvSpPr>
@@ -25507,7 +25421,7 @@
       </p:sp>
       <p:sp>
         <p:nvSpPr>
-          <p:cNvPr id="400" name=""/>
+          <p:cNvPr id="398" name=""/>
           <p:cNvSpPr txBox="1"/>
           <p:nvPr/>
         </p:nvSpPr>
@@ -25550,7 +25464,7 @@
       </p:sp>
       <p:sp>
         <p:nvSpPr>
-          <p:cNvPr id="401" name=""/>
+          <p:cNvPr id="399" name=""/>
           <p:cNvSpPr/>
           <p:nvPr/>
         </p:nvSpPr>
@@ -25591,7 +25505,7 @@
       </p:sp>
       <p:sp>
         <p:nvSpPr>
-          <p:cNvPr id="402" name=""/>
+          <p:cNvPr id="400" name=""/>
           <p:cNvSpPr/>
           <p:nvPr/>
         </p:nvSpPr>
@@ -25646,7 +25560,7 @@
       </p:sp>
       <p:sp>
         <p:nvSpPr>
-          <p:cNvPr id="403" name=""/>
+          <p:cNvPr id="401" name=""/>
           <p:cNvSpPr/>
           <p:nvPr/>
         </p:nvSpPr>
@@ -25687,7 +25601,7 @@
       </p:sp>
       <p:sp>
         <p:nvSpPr>
-          <p:cNvPr id="404" name=""/>
+          <p:cNvPr id="402" name=""/>
           <p:cNvSpPr/>
           <p:nvPr/>
         </p:nvSpPr>
@@ -25742,7 +25656,7 @@
       </p:sp>
       <p:sp>
         <p:nvSpPr>
-          <p:cNvPr id="405" name=""/>
+          <p:cNvPr id="403" name=""/>
           <p:cNvSpPr/>
           <p:nvPr/>
         </p:nvSpPr>
@@ -25783,7 +25697,7 @@
       </p:sp>
       <p:sp>
         <p:nvSpPr>
-          <p:cNvPr id="406" name=""/>
+          <p:cNvPr id="404" name=""/>
           <p:cNvSpPr/>
           <p:nvPr/>
         </p:nvSpPr>
@@ -25838,7 +25752,7 @@
       </p:sp>
       <p:sp>
         <p:nvSpPr>
-          <p:cNvPr id="407" name=""/>
+          <p:cNvPr id="405" name=""/>
           <p:cNvSpPr/>
           <p:nvPr/>
         </p:nvSpPr>
@@ -26050,7 +25964,7 @@
       </p:sp>
       <p:sp>
         <p:nvSpPr>
-          <p:cNvPr id="408" name=""/>
+          <p:cNvPr id="406" name=""/>
           <p:cNvSpPr txBox="1"/>
           <p:nvPr/>
         </p:nvSpPr>
@@ -26093,7 +26007,7 @@
       </p:sp>
       <p:sp>
         <p:nvSpPr>
-          <p:cNvPr id="409" name=""/>
+          <p:cNvPr id="407" name=""/>
           <p:cNvSpPr/>
           <p:nvPr/>
         </p:nvSpPr>
@@ -26305,7 +26219,7 @@
       </p:sp>
       <p:sp>
         <p:nvSpPr>
-          <p:cNvPr id="410" name=""/>
+          <p:cNvPr id="408" name=""/>
           <p:cNvSpPr txBox="1"/>
           <p:nvPr/>
         </p:nvSpPr>
@@ -26348,7 +26262,7 @@
       </p:sp>
       <p:sp>
         <p:nvSpPr>
-          <p:cNvPr id="411" name=""/>
+          <p:cNvPr id="409" name=""/>
           <p:cNvSpPr/>
           <p:nvPr/>
         </p:nvSpPr>
@@ -26560,7 +26474,7 @@
       </p:sp>
       <p:sp>
         <p:nvSpPr>
-          <p:cNvPr id="412" name=""/>
+          <p:cNvPr id="410" name=""/>
           <p:cNvSpPr txBox="1"/>
           <p:nvPr/>
         </p:nvSpPr>
@@ -26603,7 +26517,7 @@
       </p:sp>
       <p:sp>
         <p:nvSpPr>
-          <p:cNvPr id="413" name=""/>
+          <p:cNvPr id="411" name=""/>
           <p:cNvSpPr/>
           <p:nvPr/>
         </p:nvSpPr>
@@ -26809,7 +26723,7 @@
       </p:sp>
       <p:sp>
         <p:nvSpPr>
-          <p:cNvPr id="414" name=""/>
+          <p:cNvPr id="412" name=""/>
           <p:cNvSpPr txBox="1"/>
           <p:nvPr/>
         </p:nvSpPr>
@@ -26852,7 +26766,7 @@
       </p:sp>
       <p:sp>
         <p:nvSpPr>
-          <p:cNvPr id="415" name=""/>
+          <p:cNvPr id="413" name=""/>
           <p:cNvSpPr/>
           <p:nvPr/>
         </p:nvSpPr>
@@ -26902,7 +26816,7 @@
       </p:sp>
       <p:sp>
         <p:nvSpPr>
-          <p:cNvPr id="416" name=""/>
+          <p:cNvPr id="414" name=""/>
           <p:cNvSpPr/>
           <p:nvPr/>
         </p:nvSpPr>
@@ -26957,7 +26871,7 @@
       </p:sp>
       <p:sp>
         <p:nvSpPr>
-          <p:cNvPr id="417" name=""/>
+          <p:cNvPr id="415" name=""/>
           <p:cNvSpPr txBox="1"/>
           <p:nvPr/>
         </p:nvSpPr>
@@ -27000,7 +26914,7 @@
       </p:sp>
       <p:sp>
         <p:nvSpPr>
-          <p:cNvPr id="418" name=""/>
+          <p:cNvPr id="416" name=""/>
           <p:cNvSpPr/>
           <p:nvPr/>
         </p:nvSpPr>
@@ -27041,7 +26955,7 @@
       </p:sp>
       <p:sp>
         <p:nvSpPr>
-          <p:cNvPr id="419" name=""/>
+          <p:cNvPr id="417" name=""/>
           <p:cNvSpPr/>
           <p:nvPr/>
         </p:nvSpPr>
@@ -27096,7 +27010,7 @@
       </p:sp>
       <p:sp>
         <p:nvSpPr>
-          <p:cNvPr id="420" name=""/>
+          <p:cNvPr id="418" name=""/>
           <p:cNvSpPr/>
           <p:nvPr/>
         </p:nvSpPr>
@@ -27154,7 +27068,7 @@
       </p:sp>
       <p:sp>
         <p:nvSpPr>
-          <p:cNvPr id="421" name=""/>
+          <p:cNvPr id="419" name=""/>
           <p:cNvSpPr/>
           <p:nvPr/>
         </p:nvSpPr>
@@ -27212,7 +27126,7 @@
       </p:sp>
       <p:sp>
         <p:nvSpPr>
-          <p:cNvPr id="422" name=""/>
+          <p:cNvPr id="420" name=""/>
           <p:cNvSpPr/>
           <p:nvPr/>
         </p:nvSpPr>
@@ -27270,7 +27184,7 @@
       </p:sp>
       <p:sp>
         <p:nvSpPr>
-          <p:cNvPr id="423" name=""/>
+          <p:cNvPr id="421" name=""/>
           <p:cNvSpPr/>
           <p:nvPr/>
         </p:nvSpPr>
@@ -27328,7 +27242,7 @@
       </p:sp>
       <p:sp>
         <p:nvSpPr>
-          <p:cNvPr id="424" name=""/>
+          <p:cNvPr id="422" name=""/>
           <p:cNvSpPr/>
           <p:nvPr/>
         </p:nvSpPr>
@@ -27386,7 +27300,7 @@
       </p:sp>
       <p:sp>
         <p:nvSpPr>
-          <p:cNvPr id="425" name=""/>
+          <p:cNvPr id="423" name=""/>
           <p:cNvSpPr txBox="1"/>
           <p:nvPr/>
         </p:nvSpPr>
@@ -27429,14 +27343,14 @@
       </p:sp>
       <p:sp>
         <p:nvSpPr>
-          <p:cNvPr id="426" name=""/>
+          <p:cNvPr id="424" name=""/>
           <p:cNvSpPr txBox="1"/>
           <p:nvPr/>
         </p:nvSpPr>
         <p:spPr>
           <a:xfrm>
             <a:off x="619200" y="4498920"/>
-            <a:ext cx="9111240" cy="163440"/>
+            <a:ext cx="9029160" cy="163440"/>
           </a:xfrm>
           <a:prstGeom prst="rect">
             <a:avLst/>
@@ -27469,7 +27383,7 @@
                 <a:latin typeface="Arial"/>
                 <a:ea typeface="Arial"/>
               </a:rPr>
-              <a:t> intekenen op een speciﬁcatie (nog geen aanbod) is wat koploperscholen ons vragen; leveranciers herkennen het</a:t>
+              <a:t> intekenen op een speciﬁcatie (er is nog geen aanbod) is wat koploperscholen ons vragen; bij leveranciers is het</a:t>
             </a:r>
             <a:endParaRPr b="0" lang="en-US" sz="1110" spc="-1" strike="noStrike">
               <a:solidFill>
@@ -27482,7 +27396,7 @@
       </p:sp>
       <p:sp>
         <p:nvSpPr>
-          <p:cNvPr id="427" name=""/>
+          <p:cNvPr id="425" name=""/>
           <p:cNvSpPr/>
           <p:nvPr/>
         </p:nvSpPr>
@@ -27540,14 +27454,14 @@
       </p:sp>
       <p:sp>
         <p:nvSpPr>
-          <p:cNvPr id="428" name=""/>
+          <p:cNvPr id="426" name=""/>
           <p:cNvSpPr txBox="1"/>
           <p:nvPr/>
         </p:nvSpPr>
         <p:spPr>
           <a:xfrm>
             <a:off x="619200" y="4708440"/>
-            <a:ext cx="4673160" cy="163440"/>
+            <a:ext cx="4514760" cy="163440"/>
           </a:xfrm>
           <a:prstGeom prst="rect">
             <a:avLst/>
@@ -27570,7 +27484,7 @@
                 <a:latin typeface="Arial"/>
                 <a:ea typeface="Arial"/>
               </a:rPr>
-              <a:t>nog niet. Zien wij hetzelfde, of noemen wij twee dingen hetzelfde?</a:t>
+              <a:t>nieuw. Zien wij hetzelfde, of noemen wij twee dingen hetzelfde?</a:t>
             </a:r>
             <a:endParaRPr b="0" lang="en-US" sz="1110" spc="-1" strike="noStrike">
               <a:solidFill>
